--- a/talks/2026-08-06-prodavay-kak-faunder/Как-выигрывать-тендеры.pptx
+++ b/talks/2026-08-06-prodavay-kak-faunder/Как-выигрывать-тендеры.pptx
@@ -4327,9 +4327,16 @@
   <p:cSld name="Slide 1">
     <p:bg>
       <p:bgPr>
-        <a:solidFill>
-          <a:srgbClr val="12141A"/>
-        </a:solidFill>
+        <a:blipFill dpi="0" rotWithShape="1">
+          <a:blip r:embed="rId1">
+            <a:lum/>
+          </a:blip>
+          <a:srcRect/>
+          <a:stretch>
+            <a:fillRect/>
+          </a:stretch>
+        </a:blipFill>
+        <a:effectLst/>
       </p:bgPr>
     </p:bg>
     <p:spTree>
@@ -4538,9 +4545,16 @@
   <p:cSld name="Slide 10">
     <p:bg>
       <p:bgPr>
-        <a:solidFill>
-          <a:srgbClr val="12141A"/>
-        </a:solidFill>
+        <a:blipFill dpi="0" rotWithShape="1">
+          <a:blip r:embed="rId1">
+            <a:lum/>
+          </a:blip>
+          <a:srcRect/>
+          <a:stretch>
+            <a:fillRect/>
+          </a:stretch>
+        </a:blipFill>
+        <a:effectLst/>
       </p:bgPr>
     </p:bg>
     <p:spTree>
@@ -5760,9 +5774,16 @@
   <p:cSld name="Slide 11">
     <p:bg>
       <p:bgPr>
-        <a:solidFill>
-          <a:srgbClr val="12141A"/>
-        </a:solidFill>
+        <a:blipFill dpi="0" rotWithShape="1">
+          <a:blip r:embed="rId1">
+            <a:lum/>
+          </a:blip>
+          <a:srcRect/>
+          <a:stretch>
+            <a:fillRect/>
+          </a:stretch>
+        </a:blipFill>
+        <a:effectLst/>
       </p:bgPr>
     </p:bg>
     <p:spTree>
@@ -6241,9 +6262,16 @@
   <p:cSld name="Slide 12">
     <p:bg>
       <p:bgPr>
-        <a:solidFill>
-          <a:srgbClr val="12141A"/>
-        </a:solidFill>
+        <a:blipFill dpi="0" rotWithShape="1">
+          <a:blip r:embed="rId1">
+            <a:lum/>
+          </a:blip>
+          <a:srcRect/>
+          <a:stretch>
+            <a:fillRect/>
+          </a:stretch>
+        </a:blipFill>
+        <a:effectLst/>
       </p:bgPr>
     </p:bg>
     <p:spTree>
@@ -6742,9 +6770,16 @@
   <p:cSld name="Slide 13">
     <p:bg>
       <p:bgPr>
-        <a:solidFill>
-          <a:srgbClr val="12141A"/>
-        </a:solidFill>
+        <a:blipFill dpi="0" rotWithShape="1">
+          <a:blip r:embed="rId1">
+            <a:lum/>
+          </a:blip>
+          <a:srcRect/>
+          <a:stretch>
+            <a:fillRect/>
+          </a:stretch>
+        </a:blipFill>
+        <a:effectLst/>
       </p:bgPr>
     </p:bg>
     <p:spTree>
@@ -6954,9 +6989,16 @@
   <p:cSld name="Slide 14">
     <p:bg>
       <p:bgPr>
-        <a:solidFill>
-          <a:srgbClr val="12141A"/>
-        </a:solidFill>
+        <a:blipFill dpi="0" rotWithShape="1">
+          <a:blip r:embed="rId1">
+            <a:lum/>
+          </a:blip>
+          <a:srcRect/>
+          <a:stretch>
+            <a:fillRect/>
+          </a:stretch>
+        </a:blipFill>
+        <a:effectLst/>
       </p:bgPr>
     </p:bg>
     <p:spTree>
@@ -7987,9 +8029,16 @@
   <p:cSld name="Slide 15">
     <p:bg>
       <p:bgPr>
-        <a:solidFill>
-          <a:srgbClr val="12141A"/>
-        </a:solidFill>
+        <a:blipFill dpi="0" rotWithShape="1">
+          <a:blip r:embed="rId1">
+            <a:lum/>
+          </a:blip>
+          <a:srcRect/>
+          <a:stretch>
+            <a:fillRect/>
+          </a:stretch>
+        </a:blipFill>
+        <a:effectLst/>
       </p:bgPr>
     </p:bg>
     <p:spTree>
@@ -9014,9 +9063,16 @@
   <p:cSld name="Slide 16">
     <p:bg>
       <p:bgPr>
-        <a:solidFill>
-          <a:srgbClr val="12141A"/>
-        </a:solidFill>
+        <a:blipFill dpi="0" rotWithShape="1">
+          <a:blip r:embed="rId1">
+            <a:lum/>
+          </a:blip>
+          <a:srcRect/>
+          <a:stretch>
+            <a:fillRect/>
+          </a:stretch>
+        </a:blipFill>
+        <a:effectLst/>
       </p:bgPr>
     </p:bg>
     <p:spTree>
@@ -9495,9 +9551,16 @@
   <p:cSld name="Slide 17">
     <p:bg>
       <p:bgPr>
-        <a:solidFill>
-          <a:srgbClr val="12141A"/>
-        </a:solidFill>
+        <a:blipFill dpi="0" rotWithShape="1">
+          <a:blip r:embed="rId1">
+            <a:lum/>
+          </a:blip>
+          <a:srcRect/>
+          <a:stretch>
+            <a:fillRect/>
+          </a:stretch>
+        </a:blipFill>
+        <a:effectLst/>
       </p:bgPr>
     </p:bg>
     <p:spTree>
@@ -10052,9 +10115,16 @@
   <p:cSld name="Slide 18">
     <p:bg>
       <p:bgPr>
-        <a:solidFill>
-          <a:srgbClr val="12141A"/>
-        </a:solidFill>
+        <a:blipFill dpi="0" rotWithShape="1">
+          <a:blip r:embed="rId1">
+            <a:lum/>
+          </a:blip>
+          <a:srcRect/>
+          <a:stretch>
+            <a:fillRect/>
+          </a:stretch>
+        </a:blipFill>
+        <a:effectLst/>
       </p:bgPr>
     </p:bg>
     <p:spTree>
@@ -13852,9 +13922,16 @@
   <p:cSld name="Slide 19">
     <p:bg>
       <p:bgPr>
-        <a:solidFill>
-          <a:srgbClr val="12141A"/>
-        </a:solidFill>
+        <a:blipFill dpi="0" rotWithShape="1">
+          <a:blip r:embed="rId1">
+            <a:lum/>
+          </a:blip>
+          <a:srcRect/>
+          <a:stretch>
+            <a:fillRect/>
+          </a:stretch>
+        </a:blipFill>
+        <a:effectLst/>
       </p:bgPr>
     </p:bg>
     <p:spTree>
@@ -14033,12 +14110,12 @@
         </p:nvSpPr>
         <p:spPr>
           <a:xfrm>
-            <a:off x="777240" y="2606040"/>
-            <a:ext cx="3337560" cy="621792"/>
+            <a:off x="777240" y="2560320"/>
+            <a:ext cx="3337560" cy="685800"/>
           </a:xfrm>
           <a:prstGeom prst="roundRect">
             <a:avLst>
-              <a:gd name="adj" fmla="val 11765"/>
+              <a:gd name="adj" fmla="val 10667"/>
             </a:avLst>
           </a:prstGeom>
           <a:solidFill>
@@ -14054,30 +14131,74 @@
       </p:sp>
       <p:sp>
         <p:nvSpPr>
-          <p:cNvPr id="8" name="Text 5"/>
-          <p:cNvSpPr/>
-          <p:nvPr/>
-        </p:nvSpPr>
-        <p:spPr>
-          <a:xfrm>
-            <a:off x="1033272" y="2715768"/>
-            <a:ext cx="2880360" cy="411480"/>
-          </a:xfrm>
-          <a:prstGeom prst="rect">
-            <a:avLst/>
-          </a:prstGeom>
-          <a:noFill/>
-          <a:ln/>
-        </p:spPr>
-        <p:txBody>
-          <a:bodyPr wrap="square" lIns="0" tIns="0" rIns="0" bIns="0" rtlCol="0" anchor="ctr"/>
-          <a:lstStyle/>
-          <a:p>
-            <a:pPr indent="0" marL="0">
-              <a:buNone/>
-            </a:pPr>
-            <a:r>
-              <a:rPr lang="en-US" sz="1500" dirty="0">
+          <p:cNvPr id="8" name="Shape 5"/>
+          <p:cNvSpPr/>
+          <p:nvPr/>
+        </p:nvSpPr>
+        <p:spPr>
+          <a:xfrm>
+            <a:off x="960120" y="2679192"/>
+            <a:ext cx="448056" cy="448056"/>
+          </a:xfrm>
+          <a:prstGeom prst="ellipse">
+            <a:avLst/>
+          </a:prstGeom>
+          <a:solidFill>
+            <a:srgbClr val="2A2F3D"/>
+          </a:solidFill>
+          <a:ln/>
+        </p:spPr>
+      </p:sp>
+      <p:pic>
+        <p:nvPicPr>
+          <p:cNvPr id="9" name="Image 0" descr="/home/user/analizator-bot/talks/2026-08-06-prodavay-kak-faunder/assets/ic-history.png">    </p:cNvPr>
+          <p:cNvPicPr>
+            <a:picLocks noChangeAspect="1"/>
+          </p:cNvPicPr>
+          <p:nvPr/>
+        </p:nvPicPr>
+        <p:blipFill>
+          <a:blip r:embed="rId2"/>
+          <a:stretch>
+            <a:fillRect/>
+          </a:stretch>
+        </p:blipFill>
+        <p:spPr>
+          <a:xfrm>
+            <a:off x="1067653" y="2786725"/>
+            <a:ext cx="232989" cy="232989"/>
+          </a:xfrm>
+          <a:prstGeom prst="rect">
+            <a:avLst/>
+          </a:prstGeom>
+        </p:spPr>
+      </p:pic>
+      <p:sp>
+        <p:nvSpPr>
+          <p:cNvPr id="10" name="Text 6"/>
+          <p:cNvSpPr/>
+          <p:nvPr/>
+        </p:nvSpPr>
+        <p:spPr>
+          <a:xfrm>
+            <a:off x="1527048" y="2679192"/>
+            <a:ext cx="2423160" cy="457200"/>
+          </a:xfrm>
+          <a:prstGeom prst="rect">
+            <a:avLst/>
+          </a:prstGeom>
+          <a:noFill/>
+          <a:ln/>
+        </p:spPr>
+        <p:txBody>
+          <a:bodyPr wrap="square" lIns="0" tIns="0" rIns="0" bIns="0" rtlCol="0" anchor="ctr"/>
+          <a:lstStyle/>
+          <a:p>
+            <a:pPr indent="0" marL="0">
+              <a:buNone/>
+            </a:pPr>
+            <a:r>
+              <a:rPr lang="en-US" sz="1400" dirty="0">
                 <a:solidFill>
                   <a:srgbClr val="F2F4F8"/>
                 </a:solidFill>
@@ -14087,24 +14208,24 @@
               </a:rPr>
               <a:t>История компании</a:t>
             </a:r>
-            <a:endParaRPr lang="en-US" sz="1500" dirty="0"/>
-          </a:p>
-        </p:txBody>
-      </p:sp>
-      <p:sp>
-        <p:nvSpPr>
-          <p:cNvPr id="9" name="Shape 6"/>
-          <p:cNvSpPr/>
-          <p:nvPr/>
-        </p:nvSpPr>
-        <p:spPr>
-          <a:xfrm>
-            <a:off x="4389120" y="2606040"/>
-            <a:ext cx="3337560" cy="621792"/>
+            <a:endParaRPr lang="en-US" sz="1400" dirty="0"/>
+          </a:p>
+        </p:txBody>
+      </p:sp>
+      <p:sp>
+        <p:nvSpPr>
+          <p:cNvPr id="11" name="Shape 7"/>
+          <p:cNvSpPr/>
+          <p:nvPr/>
+        </p:nvSpPr>
+        <p:spPr>
+          <a:xfrm>
+            <a:off x="4389120" y="2560320"/>
+            <a:ext cx="3337560" cy="685800"/>
           </a:xfrm>
           <a:prstGeom prst="roundRect">
             <a:avLst>
-              <a:gd name="adj" fmla="val 11765"/>
+              <a:gd name="adj" fmla="val 10667"/>
             </a:avLst>
           </a:prstGeom>
           <a:solidFill>
@@ -14120,30 +14241,74 @@
       </p:sp>
       <p:sp>
         <p:nvSpPr>
-          <p:cNvPr id="10" name="Text 7"/>
-          <p:cNvSpPr/>
-          <p:nvPr/>
-        </p:nvSpPr>
-        <p:spPr>
-          <a:xfrm>
-            <a:off x="4645152" y="2715768"/>
-            <a:ext cx="2880360" cy="411480"/>
-          </a:xfrm>
-          <a:prstGeom prst="rect">
-            <a:avLst/>
-          </a:prstGeom>
-          <a:noFill/>
-          <a:ln/>
-        </p:spPr>
-        <p:txBody>
-          <a:bodyPr wrap="square" lIns="0" tIns="0" rIns="0" bIns="0" rtlCol="0" anchor="ctr"/>
-          <a:lstStyle/>
-          <a:p>
-            <a:pPr indent="0" marL="0">
-              <a:buNone/>
-            </a:pPr>
-            <a:r>
-              <a:rPr lang="en-US" sz="1500" dirty="0">
+          <p:cNvPr id="12" name="Shape 8"/>
+          <p:cNvSpPr/>
+          <p:nvPr/>
+        </p:nvSpPr>
+        <p:spPr>
+          <a:xfrm>
+            <a:off x="4572000" y="2679192"/>
+            <a:ext cx="448056" cy="448056"/>
+          </a:xfrm>
+          <a:prstGeom prst="ellipse">
+            <a:avLst/>
+          </a:prstGeom>
+          <a:solidFill>
+            <a:srgbClr val="2A2F3D"/>
+          </a:solidFill>
+          <a:ln/>
+        </p:spPr>
+      </p:sp>
+      <p:pic>
+        <p:nvPicPr>
+          <p:cNvPr id="13" name="Image 1" descr="/home/user/analizator-bot/talks/2026-08-06-prodavay-kak-faunder/assets/ic-contract.png">    </p:cNvPr>
+          <p:cNvPicPr>
+            <a:picLocks noChangeAspect="1"/>
+          </p:cNvPicPr>
+          <p:nvPr/>
+        </p:nvPicPr>
+        <p:blipFill>
+          <a:blip r:embed="rId3"/>
+          <a:stretch>
+            <a:fillRect/>
+          </a:stretch>
+        </p:blipFill>
+        <p:spPr>
+          <a:xfrm>
+            <a:off x="4679533" y="2786725"/>
+            <a:ext cx="232989" cy="232989"/>
+          </a:xfrm>
+          <a:prstGeom prst="rect">
+            <a:avLst/>
+          </a:prstGeom>
+        </p:spPr>
+      </p:pic>
+      <p:sp>
+        <p:nvSpPr>
+          <p:cNvPr id="14" name="Text 9"/>
+          <p:cNvSpPr/>
+          <p:nvPr/>
+        </p:nvSpPr>
+        <p:spPr>
+          <a:xfrm>
+            <a:off x="5138928" y="2679192"/>
+            <a:ext cx="2423160" cy="457200"/>
+          </a:xfrm>
+          <a:prstGeom prst="rect">
+            <a:avLst/>
+          </a:prstGeom>
+          <a:noFill/>
+          <a:ln/>
+        </p:spPr>
+        <p:txBody>
+          <a:bodyPr wrap="square" lIns="0" tIns="0" rIns="0" bIns="0" rtlCol="0" anchor="ctr"/>
+          <a:lstStyle/>
+          <a:p>
+            <a:pPr indent="0" marL="0">
+              <a:buNone/>
+            </a:pPr>
+            <a:r>
+              <a:rPr lang="en-US" sz="1400" dirty="0">
                 <a:solidFill>
                   <a:srgbClr val="F2F4F8"/>
                 </a:solidFill>
@@ -14153,24 +14318,24 @@
               </a:rPr>
               <a:t>Исполненные контракты</a:t>
             </a:r>
-            <a:endParaRPr lang="en-US" sz="1500" dirty="0"/>
-          </a:p>
-        </p:txBody>
-      </p:sp>
-      <p:sp>
-        <p:nvSpPr>
-          <p:cNvPr id="11" name="Shape 8"/>
-          <p:cNvSpPr/>
-          <p:nvPr/>
-        </p:nvSpPr>
-        <p:spPr>
-          <a:xfrm>
-            <a:off x="8001000" y="2606040"/>
-            <a:ext cx="3337560" cy="621792"/>
+            <a:endParaRPr lang="en-US" sz="1400" dirty="0"/>
+          </a:p>
+        </p:txBody>
+      </p:sp>
+      <p:sp>
+        <p:nvSpPr>
+          <p:cNvPr id="15" name="Shape 10"/>
+          <p:cNvSpPr/>
+          <p:nvPr/>
+        </p:nvSpPr>
+        <p:spPr>
+          <a:xfrm>
+            <a:off x="8001000" y="2560320"/>
+            <a:ext cx="3337560" cy="685800"/>
           </a:xfrm>
           <a:prstGeom prst="roundRect">
             <a:avLst>
-              <a:gd name="adj" fmla="val 11765"/>
+              <a:gd name="adj" fmla="val 10667"/>
             </a:avLst>
           </a:prstGeom>
           <a:solidFill>
@@ -14186,30 +14351,74 @@
       </p:sp>
       <p:sp>
         <p:nvSpPr>
-          <p:cNvPr id="12" name="Text 9"/>
-          <p:cNvSpPr/>
-          <p:nvPr/>
-        </p:nvSpPr>
-        <p:spPr>
-          <a:xfrm>
-            <a:off x="8257032" y="2715768"/>
-            <a:ext cx="2880360" cy="411480"/>
-          </a:xfrm>
-          <a:prstGeom prst="rect">
-            <a:avLst/>
-          </a:prstGeom>
-          <a:noFill/>
-          <a:ln/>
-        </p:spPr>
-        <p:txBody>
-          <a:bodyPr wrap="square" lIns="0" tIns="0" rIns="0" bIns="0" rtlCol="0" anchor="ctr"/>
-          <a:lstStyle/>
-          <a:p>
-            <a:pPr indent="0" marL="0">
-              <a:buNone/>
-            </a:pPr>
-            <a:r>
-              <a:rPr lang="en-US" sz="1500" dirty="0">
+          <p:cNvPr id="16" name="Shape 11"/>
+          <p:cNvSpPr/>
+          <p:nvPr/>
+        </p:nvSpPr>
+        <p:spPr>
+          <a:xfrm>
+            <a:off x="8183880" y="2679192"/>
+            <a:ext cx="448056" cy="448056"/>
+          </a:xfrm>
+          <a:prstGeom prst="ellipse">
+            <a:avLst/>
+          </a:prstGeom>
+          <a:solidFill>
+            <a:srgbClr val="2A2F3D"/>
+          </a:solidFill>
+          <a:ln/>
+        </p:spPr>
+      </p:sp>
+      <p:pic>
+        <p:nvPicPr>
+          <p:cNvPr id="17" name="Image 2" descr="/home/user/analizator-bot/talks/2026-08-06-prodavay-kak-faunder/assets/ic-folder.png">    </p:cNvPr>
+          <p:cNvPicPr>
+            <a:picLocks noChangeAspect="1"/>
+          </p:cNvPicPr>
+          <p:nvPr/>
+        </p:nvPicPr>
+        <p:blipFill>
+          <a:blip r:embed="rId4"/>
+          <a:stretch>
+            <a:fillRect/>
+          </a:stretch>
+        </p:blipFill>
+        <p:spPr>
+          <a:xfrm>
+            <a:off x="8291413" y="2786725"/>
+            <a:ext cx="232989" cy="232989"/>
+          </a:xfrm>
+          <a:prstGeom prst="rect">
+            <a:avLst/>
+          </a:prstGeom>
+        </p:spPr>
+      </p:pic>
+      <p:sp>
+        <p:nvSpPr>
+          <p:cNvPr id="18" name="Text 12"/>
+          <p:cNvSpPr/>
+          <p:nvPr/>
+        </p:nvSpPr>
+        <p:spPr>
+          <a:xfrm>
+            <a:off x="8750808" y="2679192"/>
+            <a:ext cx="2423160" cy="457200"/>
+          </a:xfrm>
+          <a:prstGeom prst="rect">
+            <a:avLst/>
+          </a:prstGeom>
+          <a:noFill/>
+          <a:ln/>
+        </p:spPr>
+        <p:txBody>
+          <a:bodyPr wrap="square" lIns="0" tIns="0" rIns="0" bIns="0" rtlCol="0" anchor="ctr"/>
+          <a:lstStyle/>
+          <a:p>
+            <a:pPr indent="0" marL="0">
+              <a:buNone/>
+            </a:pPr>
+            <a:r>
+              <a:rPr lang="en-US" sz="1400" dirty="0">
                 <a:solidFill>
                   <a:srgbClr val="F2F4F8"/>
                 </a:solidFill>
@@ -14219,24 +14428,24 @@
               </a:rPr>
               <a:t>Портфолио и кейсы</a:t>
             </a:r>
-            <a:endParaRPr lang="en-US" sz="1500" dirty="0"/>
-          </a:p>
-        </p:txBody>
-      </p:sp>
-      <p:sp>
-        <p:nvSpPr>
-          <p:cNvPr id="13" name="Shape 10"/>
-          <p:cNvSpPr/>
-          <p:nvPr/>
-        </p:nvSpPr>
-        <p:spPr>
-          <a:xfrm>
-            <a:off x="777240" y="3383280"/>
-            <a:ext cx="3337560" cy="621792"/>
+            <a:endParaRPr lang="en-US" sz="1400" dirty="0"/>
+          </a:p>
+        </p:txBody>
+      </p:sp>
+      <p:sp>
+        <p:nvSpPr>
+          <p:cNvPr id="19" name="Shape 13"/>
+          <p:cNvSpPr/>
+          <p:nvPr/>
+        </p:nvSpPr>
+        <p:spPr>
+          <a:xfrm>
+            <a:off x="777240" y="3401568"/>
+            <a:ext cx="3337560" cy="685800"/>
           </a:xfrm>
           <a:prstGeom prst="roundRect">
             <a:avLst>
-              <a:gd name="adj" fmla="val 11765"/>
+              <a:gd name="adj" fmla="val 10667"/>
             </a:avLst>
           </a:prstGeom>
           <a:solidFill>
@@ -14252,30 +14461,74 @@
       </p:sp>
       <p:sp>
         <p:nvSpPr>
-          <p:cNvPr id="14" name="Text 11"/>
-          <p:cNvSpPr/>
-          <p:nvPr/>
-        </p:nvSpPr>
-        <p:spPr>
-          <a:xfrm>
-            <a:off x="1033272" y="3493008"/>
-            <a:ext cx="2880360" cy="411480"/>
-          </a:xfrm>
-          <a:prstGeom prst="rect">
-            <a:avLst/>
-          </a:prstGeom>
-          <a:noFill/>
-          <a:ln/>
-        </p:spPr>
-        <p:txBody>
-          <a:bodyPr wrap="square" lIns="0" tIns="0" rIns="0" bIns="0" rtlCol="0" anchor="ctr"/>
-          <a:lstStyle/>
-          <a:p>
-            <a:pPr indent="0" marL="0">
-              <a:buNone/>
-            </a:pPr>
-            <a:r>
-              <a:rPr lang="en-US" sz="1500" dirty="0">
+          <p:cNvPr id="20" name="Shape 14"/>
+          <p:cNvSpPr/>
+          <p:nvPr/>
+        </p:nvSpPr>
+        <p:spPr>
+          <a:xfrm>
+            <a:off x="960120" y="3520440"/>
+            <a:ext cx="448056" cy="448056"/>
+          </a:xfrm>
+          <a:prstGeom prst="ellipse">
+            <a:avLst/>
+          </a:prstGeom>
+          <a:solidFill>
+            <a:srgbClr val="2A2F3D"/>
+          </a:solidFill>
+          <a:ln/>
+        </p:spPr>
+      </p:sp>
+      <p:pic>
+        <p:nvPicPr>
+          <p:cNvPr id="21" name="Image 3" descr="/home/user/analizator-bot/talks/2026-08-06-prodavay-kak-faunder/assets/ic-award.png">    </p:cNvPr>
+          <p:cNvPicPr>
+            <a:picLocks noChangeAspect="1"/>
+          </p:cNvPicPr>
+          <p:nvPr/>
+        </p:nvPicPr>
+        <p:blipFill>
+          <a:blip r:embed="rId5"/>
+          <a:stretch>
+            <a:fillRect/>
+          </a:stretch>
+        </p:blipFill>
+        <p:spPr>
+          <a:xfrm>
+            <a:off x="1067653" y="3627973"/>
+            <a:ext cx="232989" cy="232989"/>
+          </a:xfrm>
+          <a:prstGeom prst="rect">
+            <a:avLst/>
+          </a:prstGeom>
+        </p:spPr>
+      </p:pic>
+      <p:sp>
+        <p:nvSpPr>
+          <p:cNvPr id="22" name="Text 15"/>
+          <p:cNvSpPr/>
+          <p:nvPr/>
+        </p:nvSpPr>
+        <p:spPr>
+          <a:xfrm>
+            <a:off x="1527048" y="3520440"/>
+            <a:ext cx="2423160" cy="457200"/>
+          </a:xfrm>
+          <a:prstGeom prst="rect">
+            <a:avLst/>
+          </a:prstGeom>
+          <a:noFill/>
+          <a:ln/>
+        </p:spPr>
+        <p:txBody>
+          <a:bodyPr wrap="square" lIns="0" tIns="0" rIns="0" bIns="0" rtlCol="0" anchor="ctr"/>
+          <a:lstStyle/>
+          <a:p>
+            <a:pPr indent="0" marL="0">
+              <a:buNone/>
+            </a:pPr>
+            <a:r>
+              <a:rPr lang="en-US" sz="1400" dirty="0">
                 <a:solidFill>
                   <a:srgbClr val="F2F4F8"/>
                 </a:solidFill>
@@ -14285,24 +14538,24 @@
               </a:rPr>
               <a:t>Рейтинги</a:t>
             </a:r>
-            <a:endParaRPr lang="en-US" sz="1500" dirty="0"/>
-          </a:p>
-        </p:txBody>
-      </p:sp>
-      <p:sp>
-        <p:nvSpPr>
-          <p:cNvPr id="15" name="Shape 12"/>
-          <p:cNvSpPr/>
-          <p:nvPr/>
-        </p:nvSpPr>
-        <p:spPr>
-          <a:xfrm>
-            <a:off x="4389120" y="3383280"/>
-            <a:ext cx="3337560" cy="621792"/>
+            <a:endParaRPr lang="en-US" sz="1400" dirty="0"/>
+          </a:p>
+        </p:txBody>
+      </p:sp>
+      <p:sp>
+        <p:nvSpPr>
+          <p:cNvPr id="23" name="Shape 16"/>
+          <p:cNvSpPr/>
+          <p:nvPr/>
+        </p:nvSpPr>
+        <p:spPr>
+          <a:xfrm>
+            <a:off x="4389120" y="3401568"/>
+            <a:ext cx="3337560" cy="685800"/>
           </a:xfrm>
           <a:prstGeom prst="roundRect">
             <a:avLst>
-              <a:gd name="adj" fmla="val 11765"/>
+              <a:gd name="adj" fmla="val 10667"/>
             </a:avLst>
           </a:prstGeom>
           <a:solidFill>
@@ -14318,30 +14571,74 @@
       </p:sp>
       <p:sp>
         <p:nvSpPr>
-          <p:cNvPr id="16" name="Text 13"/>
-          <p:cNvSpPr/>
-          <p:nvPr/>
-        </p:nvSpPr>
-        <p:spPr>
-          <a:xfrm>
-            <a:off x="4645152" y="3493008"/>
-            <a:ext cx="2880360" cy="411480"/>
-          </a:xfrm>
-          <a:prstGeom prst="rect">
-            <a:avLst/>
-          </a:prstGeom>
-          <a:noFill/>
-          <a:ln/>
-        </p:spPr>
-        <p:txBody>
-          <a:bodyPr wrap="square" lIns="0" tIns="0" rIns="0" bIns="0" rtlCol="0" anchor="ctr"/>
-          <a:lstStyle/>
-          <a:p>
-            <a:pPr indent="0" marL="0">
-              <a:buNone/>
-            </a:pPr>
-            <a:r>
-              <a:rPr lang="en-US" sz="1500" dirty="0">
+          <p:cNvPr id="24" name="Shape 17"/>
+          <p:cNvSpPr/>
+          <p:nvPr/>
+        </p:nvSpPr>
+        <p:spPr>
+          <a:xfrm>
+            <a:off x="4572000" y="3520440"/>
+            <a:ext cx="448056" cy="448056"/>
+          </a:xfrm>
+          <a:prstGeom prst="ellipse">
+            <a:avLst/>
+          </a:prstGeom>
+          <a:solidFill>
+            <a:srgbClr val="2A2F3D"/>
+          </a:solidFill>
+          <a:ln/>
+        </p:spPr>
+      </p:sp>
+      <p:pic>
+        <p:nvPicPr>
+          <p:cNvPr id="25" name="Image 4" descr="/home/user/analizator-bot/talks/2026-08-06-prodavay-kak-faunder/assets/ic-team.png">    </p:cNvPr>
+          <p:cNvPicPr>
+            <a:picLocks noChangeAspect="1"/>
+          </p:cNvPicPr>
+          <p:nvPr/>
+        </p:nvPicPr>
+        <p:blipFill>
+          <a:blip r:embed="rId6"/>
+          <a:stretch>
+            <a:fillRect/>
+          </a:stretch>
+        </p:blipFill>
+        <p:spPr>
+          <a:xfrm>
+            <a:off x="4679533" y="3627973"/>
+            <a:ext cx="232989" cy="232989"/>
+          </a:xfrm>
+          <a:prstGeom prst="rect">
+            <a:avLst/>
+          </a:prstGeom>
+        </p:spPr>
+      </p:pic>
+      <p:sp>
+        <p:nvSpPr>
+          <p:cNvPr id="26" name="Text 18"/>
+          <p:cNvSpPr/>
+          <p:nvPr/>
+        </p:nvSpPr>
+        <p:spPr>
+          <a:xfrm>
+            <a:off x="5138928" y="3520440"/>
+            <a:ext cx="2423160" cy="457200"/>
+          </a:xfrm>
+          <a:prstGeom prst="rect">
+            <a:avLst/>
+          </a:prstGeom>
+          <a:noFill/>
+          <a:ln/>
+        </p:spPr>
+        <p:txBody>
+          <a:bodyPr wrap="square" lIns="0" tIns="0" rIns="0" bIns="0" rtlCol="0" anchor="ctr"/>
+          <a:lstStyle/>
+          <a:p>
+            <a:pPr indent="0" marL="0">
+              <a:buNone/>
+            </a:pPr>
+            <a:r>
+              <a:rPr lang="en-US" sz="1400" dirty="0">
                 <a:solidFill>
                   <a:srgbClr val="F2F4F8"/>
                 </a:solidFill>
@@ -14351,24 +14648,24 @@
               </a:rPr>
               <a:t>Команда с именами</a:t>
             </a:r>
-            <a:endParaRPr lang="en-US" sz="1500" dirty="0"/>
-          </a:p>
-        </p:txBody>
-      </p:sp>
-      <p:sp>
-        <p:nvSpPr>
-          <p:cNvPr id="17" name="Shape 14"/>
-          <p:cNvSpPr/>
-          <p:nvPr/>
-        </p:nvSpPr>
-        <p:spPr>
-          <a:xfrm>
-            <a:off x="8001000" y="3383280"/>
-            <a:ext cx="3337560" cy="621792"/>
+            <a:endParaRPr lang="en-US" sz="1400" dirty="0"/>
+          </a:p>
+        </p:txBody>
+      </p:sp>
+      <p:sp>
+        <p:nvSpPr>
+          <p:cNvPr id="27" name="Shape 19"/>
+          <p:cNvSpPr/>
+          <p:nvPr/>
+        </p:nvSpPr>
+        <p:spPr>
+          <a:xfrm>
+            <a:off x="8001000" y="3401568"/>
+            <a:ext cx="3337560" cy="685800"/>
           </a:xfrm>
           <a:prstGeom prst="roundRect">
             <a:avLst>
-              <a:gd name="adj" fmla="val 11765"/>
+              <a:gd name="adj" fmla="val 10667"/>
             </a:avLst>
           </a:prstGeom>
           <a:solidFill>
@@ -14384,30 +14681,74 @@
       </p:sp>
       <p:sp>
         <p:nvSpPr>
-          <p:cNvPr id="18" name="Text 15"/>
-          <p:cNvSpPr/>
-          <p:nvPr/>
-        </p:nvSpPr>
-        <p:spPr>
-          <a:xfrm>
-            <a:off x="8257032" y="3493008"/>
-            <a:ext cx="2880360" cy="411480"/>
-          </a:xfrm>
-          <a:prstGeom prst="rect">
-            <a:avLst/>
-          </a:prstGeom>
-          <a:noFill/>
-          <a:ln/>
-        </p:spPr>
-        <p:txBody>
-          <a:bodyPr wrap="square" lIns="0" tIns="0" rIns="0" bIns="0" rtlCol="0" anchor="ctr"/>
-          <a:lstStyle/>
-          <a:p>
-            <a:pPr indent="0" marL="0">
-              <a:buNone/>
-            </a:pPr>
-            <a:r>
-              <a:rPr lang="en-US" sz="1500" b="1" dirty="0">
+          <p:cNvPr id="28" name="Shape 20"/>
+          <p:cNvSpPr/>
+          <p:nvPr/>
+        </p:nvSpPr>
+        <p:spPr>
+          <a:xfrm>
+            <a:off x="8183880" y="3520440"/>
+            <a:ext cx="448056" cy="448056"/>
+          </a:xfrm>
+          <a:prstGeom prst="ellipse">
+            <a:avLst/>
+          </a:prstGeom>
+          <a:solidFill>
+            <a:srgbClr val="3A2A1C"/>
+          </a:solidFill>
+          <a:ln/>
+        </p:spPr>
+      </p:sp>
+      <p:pic>
+        <p:nvPicPr>
+          <p:cNvPr id="29" name="Image 5" descr="/home/user/analizator-bot/talks/2026-08-06-prodavay-kak-faunder/assets/ic-turnover.png">    </p:cNvPr>
+          <p:cNvPicPr>
+            <a:picLocks noChangeAspect="1"/>
+          </p:cNvPicPr>
+          <p:nvPr/>
+        </p:nvPicPr>
+        <p:blipFill>
+          <a:blip r:embed="rId7"/>
+          <a:stretch>
+            <a:fillRect/>
+          </a:stretch>
+        </p:blipFill>
+        <p:spPr>
+          <a:xfrm>
+            <a:off x="8291413" y="3627973"/>
+            <a:ext cx="232989" cy="232989"/>
+          </a:xfrm>
+          <a:prstGeom prst="rect">
+            <a:avLst/>
+          </a:prstGeom>
+        </p:spPr>
+      </p:pic>
+      <p:sp>
+        <p:nvSpPr>
+          <p:cNvPr id="30" name="Text 21"/>
+          <p:cNvSpPr/>
+          <p:nvPr/>
+        </p:nvSpPr>
+        <p:spPr>
+          <a:xfrm>
+            <a:off x="8750808" y="3520440"/>
+            <a:ext cx="2423160" cy="457200"/>
+          </a:xfrm>
+          <a:prstGeom prst="rect">
+            <a:avLst/>
+          </a:prstGeom>
+          <a:noFill/>
+          <a:ln/>
+        </p:spPr>
+        <p:txBody>
+          <a:bodyPr wrap="square" lIns="0" tIns="0" rIns="0" bIns="0" rtlCol="0" anchor="ctr"/>
+          <a:lstStyle/>
+          <a:p>
+            <a:pPr indent="0" marL="0">
+              <a:buNone/>
+            </a:pPr>
+            <a:r>
+              <a:rPr lang="en-US" sz="1400" b="1" dirty="0">
                 <a:solidFill>
                   <a:srgbClr val="F0862E"/>
                 </a:solidFill>
@@ -14417,13 +14758,13 @@
               </a:rPr>
               <a:t>Обороты, свойственные отрасли</a:t>
             </a:r>
-            <a:endParaRPr lang="en-US" sz="1500" dirty="0"/>
-          </a:p>
-        </p:txBody>
-      </p:sp>
-      <p:sp>
-        <p:nvSpPr>
-          <p:cNvPr id="19" name="Text 16"/>
+            <a:endParaRPr lang="en-US" sz="1400" dirty="0"/>
+          </a:p>
+        </p:txBody>
+      </p:sp>
+      <p:sp>
+        <p:nvSpPr>
+          <p:cNvPr id="31" name="Text 22"/>
           <p:cNvSpPr/>
           <p:nvPr/>
         </p:nvSpPr>
@@ -14485,7 +14826,7 @@
       </p:sp>
       <p:sp>
         <p:nvSpPr>
-          <p:cNvPr id="20" name="Text 17"/>
+          <p:cNvPr id="32" name="Text 23"/>
           <p:cNvSpPr/>
           <p:nvPr/>
         </p:nvSpPr>
@@ -14535,9 +14876,16 @@
   <p:cSld name="Slide 2">
     <p:bg>
       <p:bgPr>
-        <a:solidFill>
-          <a:srgbClr val="12141A"/>
-        </a:solidFill>
+        <a:blipFill dpi="0" rotWithShape="1">
+          <a:blip r:embed="rId1">
+            <a:lum/>
+          </a:blip>
+          <a:srcRect/>
+          <a:stretch>
+            <a:fillRect/>
+          </a:stretch>
+        </a:blipFill>
+        <a:effectLst/>
       </p:bgPr>
     </p:bg>
     <p:spTree>
@@ -18090,9 +18438,16 @@
   <p:cSld name="Slide 20">
     <p:bg>
       <p:bgPr>
-        <a:solidFill>
-          <a:srgbClr val="12141A"/>
-        </a:solidFill>
+        <a:blipFill dpi="0" rotWithShape="1">
+          <a:blip r:embed="rId1">
+            <a:lum/>
+          </a:blip>
+          <a:srcRect/>
+          <a:stretch>
+            <a:fillRect/>
+          </a:stretch>
+        </a:blipFill>
+        <a:effectLst/>
       </p:bgPr>
     </p:bg>
     <p:spTree>
@@ -19117,9 +19472,16 @@
   <p:cSld name="Slide 21">
     <p:bg>
       <p:bgPr>
-        <a:solidFill>
-          <a:srgbClr val="12141A"/>
-        </a:solidFill>
+        <a:blipFill dpi="0" rotWithShape="1">
+          <a:blip r:embed="rId1">
+            <a:lum/>
+          </a:blip>
+          <a:srcRect/>
+          <a:stretch>
+            <a:fillRect/>
+          </a:stretch>
+        </a:blipFill>
+        <a:effectLst/>
       </p:bgPr>
     </p:bg>
     <p:spTree>
@@ -19329,9 +19691,16 @@
   <p:cSld name="Slide 22">
     <p:bg>
       <p:bgPr>
-        <a:solidFill>
-          <a:srgbClr val="12141A"/>
-        </a:solidFill>
+        <a:blipFill dpi="0" rotWithShape="1">
+          <a:blip r:embed="rId1">
+            <a:lum/>
+          </a:blip>
+          <a:srcRect/>
+          <a:stretch>
+            <a:fillRect/>
+          </a:stretch>
+        </a:blipFill>
+        <a:effectLst/>
       </p:bgPr>
     </p:bg>
     <p:spTree>
@@ -19655,9 +20024,16 @@
   <p:cSld name="Slide 23">
     <p:bg>
       <p:bgPr>
-        <a:solidFill>
-          <a:srgbClr val="12141A"/>
-        </a:solidFill>
+        <a:blipFill dpi="0" rotWithShape="1">
+          <a:blip r:embed="rId1">
+            <a:lum/>
+          </a:blip>
+          <a:srcRect/>
+          <a:stretch>
+            <a:fillRect/>
+          </a:stretch>
+        </a:blipFill>
+        <a:effectLst/>
       </p:bgPr>
     </p:bg>
     <p:spTree>
@@ -20480,9 +20856,16 @@
   <p:cSld name="Slide 24">
     <p:bg>
       <p:bgPr>
-        <a:solidFill>
-          <a:srgbClr val="12141A"/>
-        </a:solidFill>
+        <a:blipFill dpi="0" rotWithShape="1">
+          <a:blip r:embed="rId1">
+            <a:lum/>
+          </a:blip>
+          <a:srcRect/>
+          <a:stretch>
+            <a:fillRect/>
+          </a:stretch>
+        </a:blipFill>
+        <a:effectLst/>
       </p:bgPr>
     </p:bg>
     <p:spTree>
@@ -20993,9 +21376,16 @@
   <p:cSld name="Slide 25">
     <p:bg>
       <p:bgPr>
-        <a:solidFill>
-          <a:srgbClr val="12141A"/>
-        </a:solidFill>
+        <a:blipFill dpi="0" rotWithShape="1">
+          <a:blip r:embed="rId1">
+            <a:lum/>
+          </a:blip>
+          <a:srcRect/>
+          <a:stretch>
+            <a:fillRect/>
+          </a:stretch>
+        </a:blipFill>
+        <a:effectLst/>
       </p:bgPr>
     </p:bg>
     <p:spTree>
@@ -21418,9 +21808,16 @@
   <p:cSld name="Slide 26">
     <p:bg>
       <p:bgPr>
-        <a:solidFill>
-          <a:srgbClr val="12141A"/>
-        </a:solidFill>
+        <a:blipFill dpi="0" rotWithShape="1">
+          <a:blip r:embed="rId1">
+            <a:lum/>
+          </a:blip>
+          <a:srcRect/>
+          <a:stretch>
+            <a:fillRect/>
+          </a:stretch>
+        </a:blipFill>
+        <a:effectLst/>
       </p:bgPr>
     </p:bg>
     <p:spTree>
@@ -22016,9 +22413,16 @@
   <p:cSld name="Slide 27">
     <p:bg>
       <p:bgPr>
-        <a:solidFill>
-          <a:srgbClr val="12141A"/>
-        </a:solidFill>
+        <a:blipFill dpi="0" rotWithShape="1">
+          <a:blip r:embed="rId1">
+            <a:lum/>
+          </a:blip>
+          <a:srcRect/>
+          <a:stretch>
+            <a:fillRect/>
+          </a:stretch>
+        </a:blipFill>
+        <a:effectLst/>
       </p:bgPr>
     </p:bg>
     <p:spTree>
@@ -22208,9 +22612,16 @@
   <p:cSld name="Slide 28">
     <p:bg>
       <p:bgPr>
-        <a:solidFill>
-          <a:srgbClr val="12141A"/>
-        </a:solidFill>
+        <a:blipFill dpi="0" rotWithShape="1">
+          <a:blip r:embed="rId1">
+            <a:lum/>
+          </a:blip>
+          <a:srcRect/>
+          <a:stretch>
+            <a:fillRect/>
+          </a:stretch>
+        </a:blipFill>
+        <a:effectLst/>
       </p:bgPr>
     </p:bg>
     <p:spTree>
@@ -22459,9 +22870,16 @@
   <p:cSld name="Slide 29">
     <p:bg>
       <p:bgPr>
-        <a:solidFill>
-          <a:srgbClr val="12141A"/>
-        </a:solidFill>
+        <a:blipFill dpi="0" rotWithShape="1">
+          <a:blip r:embed="rId1">
+            <a:lum/>
+          </a:blip>
+          <a:srcRect/>
+          <a:stretch>
+            <a:fillRect/>
+          </a:stretch>
+        </a:blipFill>
+        <a:effectLst/>
       </p:bgPr>
     </p:bg>
     <p:spTree>
@@ -23131,9 +23549,16 @@
   <p:cSld name="Slide 3">
     <p:bg>
       <p:bgPr>
-        <a:solidFill>
-          <a:srgbClr val="12141A"/>
-        </a:solidFill>
+        <a:blipFill dpi="0" rotWithShape="1">
+          <a:blip r:embed="rId1">
+            <a:lum/>
+          </a:blip>
+          <a:srcRect/>
+          <a:stretch>
+            <a:fillRect/>
+          </a:stretch>
+        </a:blipFill>
+        <a:effectLst/>
       </p:bgPr>
     </p:bg>
     <p:spTree>
@@ -23753,9 +24178,16 @@
   <p:cSld name="Slide 30">
     <p:bg>
       <p:bgPr>
-        <a:solidFill>
-          <a:srgbClr val="12141A"/>
-        </a:solidFill>
+        <a:blipFill dpi="0" rotWithShape="1">
+          <a:blip r:embed="rId1">
+            <a:lum/>
+          </a:blip>
+          <a:srcRect/>
+          <a:stretch>
+            <a:fillRect/>
+          </a:stretch>
+        </a:blipFill>
+        <a:effectLst/>
       </p:bgPr>
     </p:bg>
     <p:spTree>
@@ -24690,9 +25122,16 @@
   <p:cSld name="Slide 31">
     <p:bg>
       <p:bgPr>
-        <a:solidFill>
-          <a:srgbClr val="12141A"/>
-        </a:solidFill>
+        <a:blipFill dpi="0" rotWithShape="1">
+          <a:blip r:embed="rId1">
+            <a:lum/>
+          </a:blip>
+          <a:srcRect/>
+          <a:stretch>
+            <a:fillRect/>
+          </a:stretch>
+        </a:blipFill>
+        <a:effectLst/>
       </p:bgPr>
     </p:bg>
     <p:spTree>
@@ -25862,9 +26301,16 @@
   <p:cSld name="Slide 32">
     <p:bg>
       <p:bgPr>
-        <a:solidFill>
-          <a:srgbClr val="12141A"/>
-        </a:solidFill>
+        <a:blipFill dpi="0" rotWithShape="1">
+          <a:blip r:embed="rId1">
+            <a:lum/>
+          </a:blip>
+          <a:srcRect/>
+          <a:stretch>
+            <a:fillRect/>
+          </a:stretch>
+        </a:blipFill>
+        <a:effectLst/>
       </p:bgPr>
     </p:bg>
     <p:spTree>
@@ -26482,9 +26928,16 @@
   <p:cSld name="Slide 33">
     <p:bg>
       <p:bgPr>
-        <a:solidFill>
-          <a:srgbClr val="12141A"/>
-        </a:solidFill>
+        <a:blipFill dpi="0" rotWithShape="1">
+          <a:blip r:embed="rId1">
+            <a:lum/>
+          </a:blip>
+          <a:srcRect/>
+          <a:stretch>
+            <a:fillRect/>
+          </a:stretch>
+        </a:blipFill>
+        <a:effectLst/>
       </p:bgPr>
     </p:bg>
     <p:spTree>
@@ -27154,9 +27607,16 @@
   <p:cSld name="Slide 34">
     <p:bg>
       <p:bgPr>
-        <a:solidFill>
-          <a:srgbClr val="12141A"/>
-        </a:solidFill>
+        <a:blipFill dpi="0" rotWithShape="1">
+          <a:blip r:embed="rId1">
+            <a:lum/>
+          </a:blip>
+          <a:srcRect/>
+          <a:stretch>
+            <a:fillRect/>
+          </a:stretch>
+        </a:blipFill>
+        <a:effectLst/>
       </p:bgPr>
     </p:bg>
     <p:spTree>
@@ -27232,9 +27692,33 @@
           <a:ln/>
         </p:spPr>
       </p:sp>
-      <p:sp>
-        <p:nvSpPr>
-          <p:cNvPr id="5" name="Text 2"/>
+      <p:pic>
+        <p:nvPicPr>
+          <p:cNvPr id="5" name="Image 0" descr="/home/user/analizator-bot/talks/2026-08-06-prodavay-kak-faunder/assets/ic-truck.png">    </p:cNvPr>
+          <p:cNvPicPr>
+            <a:picLocks noChangeAspect="1"/>
+          </p:cNvPicPr>
+          <p:nvPr/>
+        </p:nvPicPr>
+        <p:blipFill>
+          <a:blip r:embed="rId2"/>
+          <a:stretch>
+            <a:fillRect/>
+          </a:stretch>
+        </p:blipFill>
+        <p:spPr>
+          <a:xfrm>
+            <a:off x="8778240" y="1737360"/>
+            <a:ext cx="2377440" cy="2377440"/>
+          </a:xfrm>
+          <a:prstGeom prst="rect">
+            <a:avLst/>
+          </a:prstGeom>
+        </p:spPr>
+      </p:pic>
+      <p:sp>
+        <p:nvSpPr>
+          <p:cNvPr id="6" name="Text 2"/>
           <p:cNvSpPr/>
           <p:nvPr/>
         </p:nvSpPr>
@@ -27255,12 +27739,12 @@
           <a:p>
             <a:pPr indent="0" marL="0">
               <a:lnSpc>
-                <a:spcPts val="5428"/>
+                <a:spcPts val="4956"/>
               </a:lnSpc>
               <a:buNone/>
             </a:pPr>
             <a:r>
-              <a:rPr lang="en-US" sz="4600" b="1" dirty="0">
+              <a:rPr lang="en-US" sz="4200" b="1" dirty="0">
                 <a:solidFill>
                   <a:srgbClr val="F2F4F8"/>
                 </a:solidFill>
@@ -27270,17 +27754,17 @@
               </a:rPr>
               <a:t>Один отчёт мы</a:t>
             </a:r>
-            <a:endParaRPr lang="en-US" sz="4600" dirty="0"/>
+            <a:endParaRPr lang="en-US" sz="4200" dirty="0"/>
           </a:p>
           <a:p>
             <a:pPr indent="0" marL="0">
               <a:lnSpc>
-                <a:spcPts val="5428"/>
+                <a:spcPts val="4956"/>
               </a:lnSpc>
               <a:buNone/>
             </a:pPr>
             <a:r>
-              <a:rPr lang="en-US" sz="4600" b="1" dirty="0">
+              <a:rPr lang="en-US" sz="4200" b="1" dirty="0">
                 <a:solidFill>
                   <a:srgbClr val="F2F4F8"/>
                 </a:solidFill>
@@ -27290,13 +27774,13 @@
               </a:rPr>
               <a:t>привозили на газели</a:t>
             </a:r>
-            <a:endParaRPr lang="en-US" sz="4600" dirty="0"/>
-          </a:p>
-        </p:txBody>
-      </p:sp>
-      <p:sp>
-        <p:nvSpPr>
-          <p:cNvPr id="6" name="Text 3"/>
+            <a:endParaRPr lang="en-US" sz="4200" dirty="0"/>
+          </a:p>
+        </p:txBody>
+      </p:sp>
+      <p:sp>
+        <p:nvSpPr>
+          <p:cNvPr id="7" name="Text 3"/>
           <p:cNvSpPr/>
           <p:nvPr/>
         </p:nvSpPr>
@@ -27335,7 +27819,7 @@
       </p:sp>
       <p:sp>
         <p:nvSpPr>
-          <p:cNvPr id="7" name="Text 4"/>
+          <p:cNvPr id="8" name="Text 4"/>
           <p:cNvSpPr/>
           <p:nvPr/>
         </p:nvSpPr>
@@ -27408,9 +27892,16 @@
   <p:cSld name="Slide 35">
     <p:bg>
       <p:bgPr>
-        <a:solidFill>
-          <a:srgbClr val="12141A"/>
-        </a:solidFill>
+        <a:blipFill dpi="0" rotWithShape="1">
+          <a:blip r:embed="rId1">
+            <a:lum/>
+          </a:blip>
+          <a:srcRect/>
+          <a:stretch>
+            <a:fillRect/>
+          </a:stretch>
+        </a:blipFill>
+        <a:effectLst/>
       </p:bgPr>
     </p:bg>
     <p:spTree>
@@ -27826,9 +28317,16 @@
   <p:cSld name="Slide 36">
     <p:bg>
       <p:bgPr>
-        <a:solidFill>
-          <a:srgbClr val="12141A"/>
-        </a:solidFill>
+        <a:blipFill dpi="0" rotWithShape="1">
+          <a:blip r:embed="rId1">
+            <a:lum/>
+          </a:blip>
+          <a:srcRect/>
+          <a:stretch>
+            <a:fillRect/>
+          </a:stretch>
+        </a:blipFill>
+        <a:effectLst/>
       </p:bgPr>
     </p:bg>
     <p:spTree>
@@ -28626,9 +29124,16 @@
   <p:cSld name="Slide 37">
     <p:bg>
       <p:bgPr>
-        <a:solidFill>
-          <a:srgbClr val="12141A"/>
-        </a:solidFill>
+        <a:blipFill dpi="0" rotWithShape="1">
+          <a:blip r:embed="rId1">
+            <a:lum/>
+          </a:blip>
+          <a:srcRect/>
+          <a:stretch>
+            <a:fillRect/>
+          </a:stretch>
+        </a:blipFill>
+        <a:effectLst/>
       </p:bgPr>
     </p:bg>
     <p:spTree>
@@ -28768,12 +29273,12 @@
         </p:nvSpPr>
         <p:spPr>
           <a:xfrm>
-            <a:off x="777240" y="2194560"/>
-            <a:ext cx="3337560" cy="1828800"/>
+            <a:off x="777240" y="2103120"/>
+            <a:ext cx="3337560" cy="2057400"/>
           </a:xfrm>
           <a:prstGeom prst="roundRect">
             <a:avLst>
-              <a:gd name="adj" fmla="val 4000"/>
+              <a:gd name="adj" fmla="val 3556"/>
             </a:avLst>
           </a:prstGeom>
           <a:solidFill>
@@ -28789,14 +29294,58 @@
       </p:sp>
       <p:sp>
         <p:nvSpPr>
-          <p:cNvPr id="7" name="Text 4"/>
-          <p:cNvSpPr/>
-          <p:nvPr/>
-        </p:nvSpPr>
-        <p:spPr>
-          <a:xfrm>
-            <a:off x="1097280" y="2377440"/>
-            <a:ext cx="2743200" cy="731520"/>
+          <p:cNvPr id="7" name="Shape 4"/>
+          <p:cNvSpPr/>
+          <p:nvPr/>
+        </p:nvSpPr>
+        <p:spPr>
+          <a:xfrm>
+            <a:off x="1097280" y="2286000"/>
+            <a:ext cx="566928" cy="566928"/>
+          </a:xfrm>
+          <a:prstGeom prst="ellipse">
+            <a:avLst/>
+          </a:prstGeom>
+          <a:solidFill>
+            <a:srgbClr val="1E3328"/>
+          </a:solidFill>
+          <a:ln/>
+        </p:spPr>
+      </p:sp>
+      <p:pic>
+        <p:nvPicPr>
+          <p:cNvPr id="8" name="Image 0" descr="/home/user/analizator-bot/talks/2026-08-06-prodavay-kak-faunder/assets/ic-shield.png">    </p:cNvPr>
+          <p:cNvPicPr>
+            <a:picLocks noChangeAspect="1"/>
+          </p:cNvPicPr>
+          <p:nvPr/>
+        </p:nvPicPr>
+        <p:blipFill>
+          <a:blip r:embed="rId2"/>
+          <a:stretch>
+            <a:fillRect/>
+          </a:stretch>
+        </p:blipFill>
+        <p:spPr>
+          <a:xfrm>
+            <a:off x="1233343" y="2422063"/>
+            <a:ext cx="294803" cy="294803"/>
+          </a:xfrm>
+          <a:prstGeom prst="rect">
+            <a:avLst/>
+          </a:prstGeom>
+        </p:spPr>
+      </p:pic>
+      <p:sp>
+        <p:nvSpPr>
+          <p:cNvPr id="9" name="Text 5"/>
+          <p:cNvSpPr/>
+          <p:nvPr/>
+        </p:nvSpPr>
+        <p:spPr>
+          <a:xfrm>
+            <a:off x="1097280" y="2926080"/>
+            <a:ext cx="2743200" cy="685800"/>
           </a:xfrm>
           <a:prstGeom prst="rect">
             <a:avLst/>
@@ -28810,12 +29359,12 @@
           <a:p>
             <a:pPr indent="0" marL="0">
               <a:lnSpc>
-                <a:spcPts val="2400"/>
+                <a:spcPts val="2300"/>
               </a:lnSpc>
               <a:buNone/>
             </a:pPr>
             <a:r>
-              <a:rPr lang="en-US" sz="1900" b="1" dirty="0">
+              <a:rPr lang="en-US" sz="1800" b="1" dirty="0">
                 <a:solidFill>
                   <a:srgbClr val="3DAE72"/>
                 </a:solidFill>
@@ -28825,17 +29374,17 @@
               </a:rPr>
               <a:t>Юридическая</a:t>
             </a:r>
-            <a:endParaRPr lang="en-US" sz="1900" dirty="0"/>
+            <a:endParaRPr lang="en-US" sz="1800" dirty="0"/>
           </a:p>
           <a:p>
             <a:pPr indent="0" marL="0">
               <a:lnSpc>
-                <a:spcPts val="2400"/>
+                <a:spcPts val="2300"/>
               </a:lnSpc>
               <a:buNone/>
             </a:pPr>
             <a:r>
-              <a:rPr lang="en-US" sz="1900" b="1" dirty="0">
+              <a:rPr lang="en-US" sz="1800" b="1" dirty="0">
                 <a:solidFill>
                   <a:srgbClr val="3DAE72"/>
                 </a:solidFill>
@@ -28845,20 +29394,20 @@
               </a:rPr>
               <a:t>проверка</a:t>
             </a:r>
-            <a:endParaRPr lang="en-US" sz="1900" dirty="0"/>
-          </a:p>
-        </p:txBody>
-      </p:sp>
-      <p:sp>
-        <p:nvSpPr>
-          <p:cNvPr id="8" name="Text 5"/>
-          <p:cNvSpPr/>
-          <p:nvPr/>
-        </p:nvSpPr>
-        <p:spPr>
-          <a:xfrm>
-            <a:off x="1097280" y="3154680"/>
-            <a:ext cx="2743200" cy="731520"/>
+            <a:endParaRPr lang="en-US" sz="1800" dirty="0"/>
+          </a:p>
+        </p:txBody>
+      </p:sp>
+      <p:sp>
+        <p:nvSpPr>
+          <p:cNvPr id="10" name="Text 6"/>
+          <p:cNvSpPr/>
+          <p:nvPr/>
+        </p:nvSpPr>
+        <p:spPr>
+          <a:xfrm>
+            <a:off x="1097280" y="3611880"/>
+            <a:ext cx="2743200" cy="502920"/>
           </a:xfrm>
           <a:prstGeom prst="rect">
             <a:avLst/>
@@ -28872,12 +29421,12 @@
           <a:p>
             <a:pPr indent="0" marL="0">
               <a:lnSpc>
-                <a:spcPts val="1800"/>
+                <a:spcPts val="1600"/>
               </a:lnSpc>
               <a:buNone/>
             </a:pPr>
             <a:r>
-              <a:rPr lang="en-US" sz="1300" dirty="0">
+              <a:rPr lang="en-US" sz="1200" dirty="0">
                 <a:solidFill>
                   <a:srgbClr val="97A0B5"/>
                 </a:solidFill>
@@ -28887,24 +29436,24 @@
               </a:rPr>
               <a:t>заказчик, история, арбитраж, РНП</a:t>
             </a:r>
-            <a:endParaRPr lang="en-US" sz="1300" dirty="0"/>
-          </a:p>
-        </p:txBody>
-      </p:sp>
-      <p:sp>
-        <p:nvSpPr>
-          <p:cNvPr id="9" name="Shape 6"/>
-          <p:cNvSpPr/>
-          <p:nvPr/>
-        </p:nvSpPr>
-        <p:spPr>
-          <a:xfrm>
-            <a:off x="4389120" y="2194560"/>
-            <a:ext cx="3337560" cy="1828800"/>
+            <a:endParaRPr lang="en-US" sz="1200" dirty="0"/>
+          </a:p>
+        </p:txBody>
+      </p:sp>
+      <p:sp>
+        <p:nvSpPr>
+          <p:cNvPr id="11" name="Shape 7"/>
+          <p:cNvSpPr/>
+          <p:nvPr/>
+        </p:nvSpPr>
+        <p:spPr>
+          <a:xfrm>
+            <a:off x="4389120" y="2103120"/>
+            <a:ext cx="3337560" cy="2057400"/>
           </a:xfrm>
           <a:prstGeom prst="roundRect">
             <a:avLst>
-              <a:gd name="adj" fmla="val 4000"/>
+              <a:gd name="adj" fmla="val 3556"/>
             </a:avLst>
           </a:prstGeom>
           <a:solidFill>
@@ -28920,14 +29469,58 @@
       </p:sp>
       <p:sp>
         <p:nvSpPr>
-          <p:cNvPr id="10" name="Text 7"/>
-          <p:cNvSpPr/>
-          <p:nvPr/>
-        </p:nvSpPr>
-        <p:spPr>
-          <a:xfrm>
-            <a:off x="4709160" y="2377440"/>
-            <a:ext cx="2743200" cy="731520"/>
+          <p:cNvPr id="12" name="Shape 8"/>
+          <p:cNvSpPr/>
+          <p:nvPr/>
+        </p:nvSpPr>
+        <p:spPr>
+          <a:xfrm>
+            <a:off x="4709160" y="2286000"/>
+            <a:ext cx="566928" cy="566928"/>
+          </a:xfrm>
+          <a:prstGeom prst="ellipse">
+            <a:avLst/>
+          </a:prstGeom>
+          <a:solidFill>
+            <a:srgbClr val="1E3328"/>
+          </a:solidFill>
+          <a:ln/>
+        </p:spPr>
+      </p:sp>
+      <p:pic>
+        <p:nvPicPr>
+          <p:cNvPr id="13" name="Image 1" descr="/home/user/analizator-bot/talks/2026-08-06-prodavay-kak-faunder/assets/ic-search.png">    </p:cNvPr>
+          <p:cNvPicPr>
+            <a:picLocks noChangeAspect="1"/>
+          </p:cNvPicPr>
+          <p:nvPr/>
+        </p:nvPicPr>
+        <p:blipFill>
+          <a:blip r:embed="rId3"/>
+          <a:stretch>
+            <a:fillRect/>
+          </a:stretch>
+        </p:blipFill>
+        <p:spPr>
+          <a:xfrm>
+            <a:off x="4845223" y="2422063"/>
+            <a:ext cx="294803" cy="294803"/>
+          </a:xfrm>
+          <a:prstGeom prst="rect">
+            <a:avLst/>
+          </a:prstGeom>
+        </p:spPr>
+      </p:pic>
+      <p:sp>
+        <p:nvSpPr>
+          <p:cNvPr id="14" name="Text 9"/>
+          <p:cNvSpPr/>
+          <p:nvPr/>
+        </p:nvSpPr>
+        <p:spPr>
+          <a:xfrm>
+            <a:off x="4709160" y="2926080"/>
+            <a:ext cx="2743200" cy="685800"/>
           </a:xfrm>
           <a:prstGeom prst="rect">
             <a:avLst/>
@@ -28941,12 +29534,12 @@
           <a:p>
             <a:pPr indent="0" marL="0">
               <a:lnSpc>
-                <a:spcPts val="2400"/>
+                <a:spcPts val="2300"/>
               </a:lnSpc>
               <a:buNone/>
             </a:pPr>
             <a:r>
-              <a:rPr lang="en-US" sz="1900" b="1" dirty="0">
+              <a:rPr lang="en-US" sz="1800" b="1" dirty="0">
                 <a:solidFill>
                   <a:srgbClr val="3DAE72"/>
                 </a:solidFill>
@@ -28956,17 +29549,17 @@
               </a:rPr>
               <a:t>Аналитика</a:t>
             </a:r>
-            <a:endParaRPr lang="en-US" sz="1900" dirty="0"/>
+            <a:endParaRPr lang="en-US" sz="1800" dirty="0"/>
           </a:p>
           <a:p>
             <a:pPr indent="0" marL="0">
               <a:lnSpc>
-                <a:spcPts val="2400"/>
+                <a:spcPts val="2300"/>
               </a:lnSpc>
               <a:buNone/>
             </a:pPr>
             <a:r>
-              <a:rPr lang="en-US" sz="1900" b="1" dirty="0">
+              <a:rPr lang="en-US" sz="1800" b="1" dirty="0">
                 <a:solidFill>
                   <a:srgbClr val="3DAE72"/>
                 </a:solidFill>
@@ -28976,20 +29569,20 @@
               </a:rPr>
               <a:t>ЕИС</a:t>
             </a:r>
-            <a:endParaRPr lang="en-US" sz="1900" dirty="0"/>
-          </a:p>
-        </p:txBody>
-      </p:sp>
-      <p:sp>
-        <p:nvSpPr>
-          <p:cNvPr id="11" name="Text 8"/>
-          <p:cNvSpPr/>
-          <p:nvPr/>
-        </p:nvSpPr>
-        <p:spPr>
-          <a:xfrm>
-            <a:off x="4709160" y="3154680"/>
-            <a:ext cx="2743200" cy="731520"/>
+            <a:endParaRPr lang="en-US" sz="1800" dirty="0"/>
+          </a:p>
+        </p:txBody>
+      </p:sp>
+      <p:sp>
+        <p:nvSpPr>
+          <p:cNvPr id="15" name="Text 10"/>
+          <p:cNvSpPr/>
+          <p:nvPr/>
+        </p:nvSpPr>
+        <p:spPr>
+          <a:xfrm>
+            <a:off x="4709160" y="3611880"/>
+            <a:ext cx="2743200" cy="502920"/>
           </a:xfrm>
           <a:prstGeom prst="rect">
             <a:avLst/>
@@ -29003,12 +29596,12 @@
           <a:p>
             <a:pPr indent="0" marL="0">
               <a:lnSpc>
-                <a:spcPts val="1800"/>
+                <a:spcPts val="1600"/>
               </a:lnSpc>
               <a:buNone/>
             </a:pPr>
             <a:r>
-              <a:rPr lang="en-US" sz="1300" dirty="0">
+              <a:rPr lang="en-US" sz="1200" dirty="0">
                 <a:solidFill>
                   <a:srgbClr val="97A0B5"/>
                 </a:solidFill>
@@ -29018,24 +29611,24 @@
               </a:rPr>
               <a:t>кто выигрывал, с каким снижением, что планируют</a:t>
             </a:r>
-            <a:endParaRPr lang="en-US" sz="1300" dirty="0"/>
-          </a:p>
-        </p:txBody>
-      </p:sp>
-      <p:sp>
-        <p:nvSpPr>
-          <p:cNvPr id="12" name="Shape 9"/>
-          <p:cNvSpPr/>
-          <p:nvPr/>
-        </p:nvSpPr>
-        <p:spPr>
-          <a:xfrm>
-            <a:off x="8001000" y="2194560"/>
-            <a:ext cx="3337560" cy="1828800"/>
+            <a:endParaRPr lang="en-US" sz="1200" dirty="0"/>
+          </a:p>
+        </p:txBody>
+      </p:sp>
+      <p:sp>
+        <p:nvSpPr>
+          <p:cNvPr id="16" name="Shape 11"/>
+          <p:cNvSpPr/>
+          <p:nvPr/>
+        </p:nvSpPr>
+        <p:spPr>
+          <a:xfrm>
+            <a:off x="8001000" y="2103120"/>
+            <a:ext cx="3337560" cy="2057400"/>
           </a:xfrm>
           <a:prstGeom prst="roundRect">
             <a:avLst>
-              <a:gd name="adj" fmla="val 4000"/>
+              <a:gd name="adj" fmla="val 3556"/>
             </a:avLst>
           </a:prstGeom>
           <a:solidFill>
@@ -29051,14 +29644,58 @@
       </p:sp>
       <p:sp>
         <p:nvSpPr>
-          <p:cNvPr id="13" name="Text 10"/>
-          <p:cNvSpPr/>
-          <p:nvPr/>
-        </p:nvSpPr>
-        <p:spPr>
-          <a:xfrm>
-            <a:off x="8321040" y="2377440"/>
-            <a:ext cx="2743200" cy="731520"/>
+          <p:cNvPr id="17" name="Shape 12"/>
+          <p:cNvSpPr/>
+          <p:nvPr/>
+        </p:nvSpPr>
+        <p:spPr>
+          <a:xfrm>
+            <a:off x="8321040" y="2286000"/>
+            <a:ext cx="566928" cy="566928"/>
+          </a:xfrm>
+          <a:prstGeom prst="ellipse">
+            <a:avLst/>
+          </a:prstGeom>
+          <a:solidFill>
+            <a:srgbClr val="1E3328"/>
+          </a:solidFill>
+          <a:ln/>
+        </p:spPr>
+      </p:sp>
+      <p:pic>
+        <p:nvPicPr>
+          <p:cNvPr id="18" name="Image 2" descr="/home/user/analizator-bot/talks/2026-08-06-prodavay-kak-faunder/assets/ic-calc.png">    </p:cNvPr>
+          <p:cNvPicPr>
+            <a:picLocks noChangeAspect="1"/>
+          </p:cNvPicPr>
+          <p:nvPr/>
+        </p:nvPicPr>
+        <p:blipFill>
+          <a:blip r:embed="rId4"/>
+          <a:stretch>
+            <a:fillRect/>
+          </a:stretch>
+        </p:blipFill>
+        <p:spPr>
+          <a:xfrm>
+            <a:off x="8457103" y="2422063"/>
+            <a:ext cx="294803" cy="294803"/>
+          </a:xfrm>
+          <a:prstGeom prst="rect">
+            <a:avLst/>
+          </a:prstGeom>
+        </p:spPr>
+      </p:pic>
+      <p:sp>
+        <p:nvSpPr>
+          <p:cNvPr id="19" name="Text 13"/>
+          <p:cNvSpPr/>
+          <p:nvPr/>
+        </p:nvSpPr>
+        <p:spPr>
+          <a:xfrm>
+            <a:off x="8321040" y="2926080"/>
+            <a:ext cx="2743200" cy="685800"/>
           </a:xfrm>
           <a:prstGeom prst="rect">
             <a:avLst/>
@@ -29072,12 +29709,12 @@
           <a:p>
             <a:pPr indent="0" marL="0">
               <a:lnSpc>
-                <a:spcPts val="2400"/>
+                <a:spcPts val="2300"/>
               </a:lnSpc>
               <a:buNone/>
             </a:pPr>
             <a:r>
-              <a:rPr lang="en-US" sz="1900" b="1" dirty="0">
+              <a:rPr lang="en-US" sz="1800" b="1" dirty="0">
                 <a:solidFill>
                   <a:srgbClr val="3DAE72"/>
                 </a:solidFill>
@@ -29087,17 +29724,17 @@
               </a:rPr>
               <a:t>Предварительная</a:t>
             </a:r>
-            <a:endParaRPr lang="en-US" sz="1900" dirty="0"/>
+            <a:endParaRPr lang="en-US" sz="1800" dirty="0"/>
           </a:p>
           <a:p>
             <a:pPr indent="0" marL="0">
               <a:lnSpc>
-                <a:spcPts val="2400"/>
+                <a:spcPts val="2300"/>
               </a:lnSpc>
               <a:buNone/>
             </a:pPr>
             <a:r>
-              <a:rPr lang="en-US" sz="1900" b="1" dirty="0">
+              <a:rPr lang="en-US" sz="1800" b="1" dirty="0">
                 <a:solidFill>
                   <a:srgbClr val="3DAE72"/>
                 </a:solidFill>
@@ -29107,20 +29744,20 @@
               </a:rPr>
               <a:t>смета</a:t>
             </a:r>
-            <a:endParaRPr lang="en-US" sz="1900" dirty="0"/>
-          </a:p>
-        </p:txBody>
-      </p:sp>
-      <p:sp>
-        <p:nvSpPr>
-          <p:cNvPr id="14" name="Text 11"/>
-          <p:cNvSpPr/>
-          <p:nvPr/>
-        </p:nvSpPr>
-        <p:spPr>
-          <a:xfrm>
-            <a:off x="8321040" y="3154680"/>
-            <a:ext cx="2743200" cy="731520"/>
+            <a:endParaRPr lang="en-US" sz="1800" dirty="0"/>
+          </a:p>
+        </p:txBody>
+      </p:sp>
+      <p:sp>
+        <p:nvSpPr>
+          <p:cNvPr id="20" name="Text 14"/>
+          <p:cNvSpPr/>
+          <p:nvPr/>
+        </p:nvSpPr>
+        <p:spPr>
+          <a:xfrm>
+            <a:off x="8321040" y="3611880"/>
+            <a:ext cx="2743200" cy="502920"/>
           </a:xfrm>
           <a:prstGeom prst="rect">
             <a:avLst/>
@@ -29134,12 +29771,12 @@
           <a:p>
             <a:pPr indent="0" marL="0">
               <a:lnSpc>
-                <a:spcPts val="1800"/>
+                <a:spcPts val="1600"/>
               </a:lnSpc>
               <a:buNone/>
             </a:pPr>
             <a:r>
-              <a:rPr lang="en-US" sz="1300" dirty="0">
+              <a:rPr lang="en-US" sz="1200" dirty="0">
                 <a:solidFill>
                   <a:srgbClr val="97A0B5"/>
                 </a:solidFill>
@@ -29149,13 +29786,13 @@
               </a:rPr>
               <a:t>похожие контракты, наши загруженные расчёты, открытые источники</a:t>
             </a:r>
-            <a:endParaRPr lang="en-US" sz="1300" dirty="0"/>
-          </a:p>
-        </p:txBody>
-      </p:sp>
-      <p:sp>
-        <p:nvSpPr>
-          <p:cNvPr id="15" name="Shape 12"/>
+            <a:endParaRPr lang="en-US" sz="1200" dirty="0"/>
+          </a:p>
+        </p:txBody>
+      </p:sp>
+      <p:sp>
+        <p:nvSpPr>
+          <p:cNvPr id="21" name="Shape 15"/>
           <p:cNvSpPr/>
           <p:nvPr/>
         </p:nvSpPr>
@@ -29182,7 +29819,7 @@
       </p:sp>
       <p:sp>
         <p:nvSpPr>
-          <p:cNvPr id="16" name="Text 13"/>
+          <p:cNvPr id="22" name="Text 16"/>
           <p:cNvSpPr/>
           <p:nvPr/>
         </p:nvSpPr>
@@ -29221,7 +29858,7 @@
       </p:sp>
       <p:sp>
         <p:nvSpPr>
-          <p:cNvPr id="17" name="Shape 14"/>
+          <p:cNvPr id="23" name="Shape 17"/>
           <p:cNvSpPr/>
           <p:nvPr/>
         </p:nvSpPr>
@@ -29241,7 +29878,7 @@
       </p:sp>
       <p:sp>
         <p:nvSpPr>
-          <p:cNvPr id="18" name="Text 15"/>
+          <p:cNvPr id="24" name="Text 18"/>
           <p:cNvSpPr/>
           <p:nvPr/>
         </p:nvSpPr>
@@ -29280,7 +29917,7 @@
       </p:sp>
       <p:sp>
         <p:nvSpPr>
-          <p:cNvPr id="19" name="Shape 16"/>
+          <p:cNvPr id="25" name="Shape 19"/>
           <p:cNvSpPr/>
           <p:nvPr/>
         </p:nvSpPr>
@@ -29300,7 +29937,7 @@
       </p:sp>
       <p:sp>
         <p:nvSpPr>
-          <p:cNvPr id="20" name="Text 17"/>
+          <p:cNvPr id="26" name="Text 20"/>
           <p:cNvSpPr/>
           <p:nvPr/>
         </p:nvSpPr>
@@ -29350,9 +29987,16 @@
   <p:cSld name="Slide 38">
     <p:bg>
       <p:bgPr>
-        <a:solidFill>
-          <a:srgbClr val="12141A"/>
-        </a:solidFill>
+        <a:blipFill dpi="0" rotWithShape="1">
+          <a:blip r:embed="rId1">
+            <a:lum/>
+          </a:blip>
+          <a:srcRect/>
+          <a:stretch>
+            <a:fillRect/>
+          </a:stretch>
+        </a:blipFill>
+        <a:effectLst/>
       </p:bgPr>
     </p:bg>
     <p:spTree>
@@ -29978,9 +30622,16 @@
   <p:cSld name="Slide 39">
     <p:bg>
       <p:bgPr>
-        <a:solidFill>
-          <a:srgbClr val="12141A"/>
-        </a:solidFill>
+        <a:blipFill dpi="0" rotWithShape="1">
+          <a:blip r:embed="rId1">
+            <a:lum/>
+          </a:blip>
+          <a:srcRect/>
+          <a:stretch>
+            <a:fillRect/>
+          </a:stretch>
+        </a:blipFill>
+        <a:effectLst/>
       </p:bgPr>
     </p:bg>
     <p:spTree>
@@ -30734,9 +31385,16 @@
   <p:cSld name="Slide 4">
     <p:bg>
       <p:bgPr>
-        <a:solidFill>
-          <a:srgbClr val="12141A"/>
-        </a:solidFill>
+        <a:blipFill dpi="0" rotWithShape="1">
+          <a:blip r:embed="rId1">
+            <a:lum/>
+          </a:blip>
+          <a:srcRect/>
+          <a:stretch>
+            <a:fillRect/>
+          </a:stretch>
+        </a:blipFill>
+        <a:effectLst/>
       </p:bgPr>
     </p:bg>
     <p:spTree>
@@ -30886,9 +31544,16 @@
   <p:cSld name="Slide 40">
     <p:bg>
       <p:bgPr>
-        <a:solidFill>
-          <a:srgbClr val="12141A"/>
-        </a:solidFill>
+        <a:blipFill dpi="0" rotWithShape="1">
+          <a:blip r:embed="rId1">
+            <a:lum/>
+          </a:blip>
+          <a:srcRect/>
+          <a:stretch>
+            <a:fillRect/>
+          </a:stretch>
+        </a:blipFill>
+        <a:effectLst/>
       </p:bgPr>
     </p:bg>
     <p:spTree>
@@ -31097,9 +31762,16 @@
   <p:cSld name="Slide 5">
     <p:bg>
       <p:bgPr>
-        <a:solidFill>
-          <a:srgbClr val="12141A"/>
-        </a:solidFill>
+        <a:blipFill dpi="0" rotWithShape="1">
+          <a:blip r:embed="rId1">
+            <a:lum/>
+          </a:blip>
+          <a:srcRect/>
+          <a:stretch>
+            <a:fillRect/>
+          </a:stretch>
+        </a:blipFill>
+        <a:effectLst/>
       </p:bgPr>
     </p:bg>
     <p:spTree>
@@ -31505,9 +32177,16 @@
   <p:cSld name="Slide 6">
     <p:bg>
       <p:bgPr>
-        <a:solidFill>
-          <a:srgbClr val="12141A"/>
-        </a:solidFill>
+        <a:blipFill dpi="0" rotWithShape="1">
+          <a:blip r:embed="rId1">
+            <a:lum/>
+          </a:blip>
+          <a:srcRect/>
+          <a:stretch>
+            <a:fillRect/>
+          </a:stretch>
+        </a:blipFill>
+        <a:effectLst/>
       </p:bgPr>
     </p:bg>
     <p:spTree>
@@ -31598,27 +32277,51 @@
         </p:nvSpPr>
         <p:spPr>
           <a:xfrm>
-            <a:off x="1005840" y="2148840"/>
-            <a:ext cx="182880" cy="182880"/>
-          </a:xfrm>
-          <a:prstGeom prst="ellipse">
-            <a:avLst/>
-          </a:prstGeom>
-          <a:solidFill>
-            <a:srgbClr val="4A90D9"/>
-          </a:solidFill>
-          <a:ln/>
-        </p:spPr>
-      </p:sp>
-      <p:sp>
-        <p:nvSpPr>
-          <p:cNvPr id="6" name="Text 3"/>
-          <p:cNvSpPr/>
-          <p:nvPr/>
-        </p:nvSpPr>
-        <p:spPr>
-          <a:xfrm>
-            <a:off x="1005840" y="2514600"/>
+            <a:off x="1005840" y="2103120"/>
+            <a:ext cx="658368" cy="658368"/>
+          </a:xfrm>
+          <a:prstGeom prst="ellipse">
+            <a:avLst/>
+          </a:prstGeom>
+          <a:solidFill>
+            <a:srgbClr val="232838"/>
+          </a:solidFill>
+          <a:ln/>
+        </p:spPr>
+      </p:sp>
+      <p:pic>
+        <p:nvPicPr>
+          <p:cNvPr id="6" name="Image 0" descr="/home/user/analizator-bot/talks/2026-08-06-prodavay-kak-faunder/assets/ic-gos.png">    </p:cNvPr>
+          <p:cNvPicPr>
+            <a:picLocks noChangeAspect="1"/>
+          </p:cNvPicPr>
+          <p:nvPr/>
+        </p:nvPicPr>
+        <p:blipFill>
+          <a:blip r:embed="rId2"/>
+          <a:stretch>
+            <a:fillRect/>
+          </a:stretch>
+        </p:blipFill>
+        <p:spPr>
+          <a:xfrm>
+            <a:off x="1163848" y="2261128"/>
+            <a:ext cx="342351" cy="342351"/>
+          </a:xfrm>
+          <a:prstGeom prst="rect">
+            <a:avLst/>
+          </a:prstGeom>
+        </p:spPr>
+      </p:pic>
+      <p:sp>
+        <p:nvSpPr>
+          <p:cNvPr id="7" name="Text 3"/>
+          <p:cNvSpPr/>
+          <p:nvPr/>
+        </p:nvSpPr>
+        <p:spPr>
+          <a:xfrm>
+            <a:off x="1005840" y="2880360"/>
             <a:ext cx="2834640" cy="411480"/>
           </a:xfrm>
           <a:prstGeom prst="rect">
@@ -31651,13 +32354,13 @@
       </p:sp>
       <p:sp>
         <p:nvSpPr>
-          <p:cNvPr id="7" name="Text 4"/>
-          <p:cNvSpPr/>
-          <p:nvPr/>
-        </p:nvSpPr>
-        <p:spPr>
-          <a:xfrm>
-            <a:off x="1005840" y="2926080"/>
+          <p:cNvPr id="8" name="Text 4"/>
+          <p:cNvSpPr/>
+          <p:nvPr/>
+        </p:nvSpPr>
+        <p:spPr>
+          <a:xfrm>
+            <a:off x="1005840" y="3291840"/>
             <a:ext cx="2834640" cy="320040"/>
           </a:xfrm>
           <a:prstGeom prst="rect">
@@ -31690,13 +32393,13 @@
       </p:sp>
       <p:sp>
         <p:nvSpPr>
-          <p:cNvPr id="8" name="Text 5"/>
-          <p:cNvSpPr/>
-          <p:nvPr/>
-        </p:nvSpPr>
-        <p:spPr>
-          <a:xfrm>
-            <a:off x="1005840" y="3429000"/>
+          <p:cNvPr id="9" name="Text 5"/>
+          <p:cNvSpPr/>
+          <p:nvPr/>
+        </p:nvSpPr>
+        <p:spPr>
+          <a:xfrm>
+            <a:off x="1005840" y="3749040"/>
             <a:ext cx="2834640" cy="914400"/>
           </a:xfrm>
           <a:prstGeom prst="rect">
@@ -31752,13 +32455,13 @@
       </p:sp>
       <p:sp>
         <p:nvSpPr>
-          <p:cNvPr id="9" name="Text 6"/>
-          <p:cNvSpPr/>
-          <p:nvPr/>
-        </p:nvSpPr>
-        <p:spPr>
-          <a:xfrm>
-            <a:off x="1005840" y="4617720"/>
+          <p:cNvPr id="10" name="Text 6"/>
+          <p:cNvSpPr/>
+          <p:nvPr/>
+        </p:nvSpPr>
+        <p:spPr>
+          <a:xfrm>
+            <a:off x="1005840" y="4754880"/>
             <a:ext cx="2834640" cy="457200"/>
           </a:xfrm>
           <a:prstGeom prst="rect">
@@ -31791,7 +32494,7 @@
       </p:sp>
       <p:sp>
         <p:nvSpPr>
-          <p:cNvPr id="10" name="Shape 7"/>
+          <p:cNvPr id="11" name="Shape 7"/>
           <p:cNvSpPr/>
           <p:nvPr/>
         </p:nvSpPr>
@@ -31818,33 +32521,57 @@
       </p:sp>
       <p:sp>
         <p:nvSpPr>
-          <p:cNvPr id="11" name="Shape 8"/>
-          <p:cNvSpPr/>
-          <p:nvPr/>
-        </p:nvSpPr>
-        <p:spPr>
-          <a:xfrm>
-            <a:off x="4709160" y="2148840"/>
-            <a:ext cx="182880" cy="182880"/>
-          </a:xfrm>
-          <a:prstGeom prst="ellipse">
-            <a:avLst/>
-          </a:prstGeom>
-          <a:solidFill>
-            <a:srgbClr val="9B6BD9"/>
-          </a:solidFill>
-          <a:ln/>
-        </p:spPr>
-      </p:sp>
-      <p:sp>
-        <p:nvSpPr>
-          <p:cNvPr id="12" name="Text 9"/>
-          <p:cNvSpPr/>
-          <p:nvPr/>
-        </p:nvSpPr>
-        <p:spPr>
-          <a:xfrm>
-            <a:off x="4709160" y="2514600"/>
+          <p:cNvPr id="12" name="Shape 8"/>
+          <p:cNvSpPr/>
+          <p:nvPr/>
+        </p:nvSpPr>
+        <p:spPr>
+          <a:xfrm>
+            <a:off x="4709160" y="2103120"/>
+            <a:ext cx="658368" cy="658368"/>
+          </a:xfrm>
+          <a:prstGeom prst="ellipse">
+            <a:avLst/>
+          </a:prstGeom>
+          <a:solidFill>
+            <a:srgbClr val="232838"/>
+          </a:solidFill>
+          <a:ln/>
+        </p:spPr>
+      </p:sp>
+      <p:pic>
+        <p:nvPicPr>
+          <p:cNvPr id="13" name="Image 1" descr="/home/user/analizator-bot/talks/2026-08-06-prodavay-kak-faunder/assets/ic-corp.png">    </p:cNvPr>
+          <p:cNvPicPr>
+            <a:picLocks noChangeAspect="1"/>
+          </p:cNvPicPr>
+          <p:nvPr/>
+        </p:nvPicPr>
+        <p:blipFill>
+          <a:blip r:embed="rId3"/>
+          <a:stretch>
+            <a:fillRect/>
+          </a:stretch>
+        </p:blipFill>
+        <p:spPr>
+          <a:xfrm>
+            <a:off x="4867168" y="2261128"/>
+            <a:ext cx="342351" cy="342351"/>
+          </a:xfrm>
+          <a:prstGeom prst="rect">
+            <a:avLst/>
+          </a:prstGeom>
+        </p:spPr>
+      </p:pic>
+      <p:sp>
+        <p:nvSpPr>
+          <p:cNvPr id="14" name="Text 9"/>
+          <p:cNvSpPr/>
+          <p:nvPr/>
+        </p:nvSpPr>
+        <p:spPr>
+          <a:xfrm>
+            <a:off x="4709160" y="2880360"/>
             <a:ext cx="2834640" cy="411480"/>
           </a:xfrm>
           <a:prstGeom prst="rect">
@@ -31877,13 +32604,13 @@
       </p:sp>
       <p:sp>
         <p:nvSpPr>
-          <p:cNvPr id="13" name="Text 10"/>
-          <p:cNvSpPr/>
-          <p:nvPr/>
-        </p:nvSpPr>
-        <p:spPr>
-          <a:xfrm>
-            <a:off x="4709160" y="2926080"/>
+          <p:cNvPr id="15" name="Text 10"/>
+          <p:cNvSpPr/>
+          <p:nvPr/>
+        </p:nvSpPr>
+        <p:spPr>
+          <a:xfrm>
+            <a:off x="4709160" y="3291840"/>
             <a:ext cx="2834640" cy="320040"/>
           </a:xfrm>
           <a:prstGeom prst="rect">
@@ -31916,13 +32643,13 @@
       </p:sp>
       <p:sp>
         <p:nvSpPr>
-          <p:cNvPr id="14" name="Text 11"/>
-          <p:cNvSpPr/>
-          <p:nvPr/>
-        </p:nvSpPr>
-        <p:spPr>
-          <a:xfrm>
-            <a:off x="4709160" y="3429000"/>
+          <p:cNvPr id="16" name="Text 11"/>
+          <p:cNvSpPr/>
+          <p:nvPr/>
+        </p:nvSpPr>
+        <p:spPr>
+          <a:xfrm>
+            <a:off x="4709160" y="3749040"/>
             <a:ext cx="2834640" cy="914400"/>
           </a:xfrm>
           <a:prstGeom prst="rect">
@@ -31978,13 +32705,13 @@
       </p:sp>
       <p:sp>
         <p:nvSpPr>
-          <p:cNvPr id="15" name="Text 12"/>
-          <p:cNvSpPr/>
-          <p:nvPr/>
-        </p:nvSpPr>
-        <p:spPr>
-          <a:xfrm>
-            <a:off x="4709160" y="4617720"/>
+          <p:cNvPr id="17" name="Text 12"/>
+          <p:cNvSpPr/>
+          <p:nvPr/>
+        </p:nvSpPr>
+        <p:spPr>
+          <a:xfrm>
+            <a:off x="4709160" y="4754880"/>
             <a:ext cx="2834640" cy="457200"/>
           </a:xfrm>
           <a:prstGeom prst="rect">
@@ -32017,7 +32744,7 @@
       </p:sp>
       <p:sp>
         <p:nvSpPr>
-          <p:cNvPr id="16" name="Shape 13"/>
+          <p:cNvPr id="18" name="Shape 13"/>
           <p:cNvSpPr/>
           <p:nvPr/>
         </p:nvSpPr>
@@ -32044,33 +32771,57 @@
       </p:sp>
       <p:sp>
         <p:nvSpPr>
-          <p:cNvPr id="17" name="Shape 14"/>
-          <p:cNvSpPr/>
-          <p:nvPr/>
-        </p:nvSpPr>
-        <p:spPr>
-          <a:xfrm>
-            <a:off x="8412480" y="2148840"/>
-            <a:ext cx="182880" cy="182880"/>
-          </a:xfrm>
-          <a:prstGeom prst="ellipse">
-            <a:avLst/>
-          </a:prstGeom>
-          <a:solidFill>
-            <a:srgbClr val="F0862E"/>
-          </a:solidFill>
-          <a:ln/>
-        </p:spPr>
-      </p:sp>
-      <p:sp>
-        <p:nvSpPr>
-          <p:cNvPr id="18" name="Text 15"/>
-          <p:cNvSpPr/>
-          <p:nvPr/>
-        </p:nvSpPr>
-        <p:spPr>
-          <a:xfrm>
-            <a:off x="8412480" y="2514600"/>
+          <p:cNvPr id="19" name="Shape 14"/>
+          <p:cNvSpPr/>
+          <p:nvPr/>
+        </p:nvSpPr>
+        <p:spPr>
+          <a:xfrm>
+            <a:off x="8412480" y="2103120"/>
+            <a:ext cx="658368" cy="658368"/>
+          </a:xfrm>
+          <a:prstGeom prst="ellipse">
+            <a:avLst/>
+          </a:prstGeom>
+          <a:solidFill>
+            <a:srgbClr val="232838"/>
+          </a:solidFill>
+          <a:ln/>
+        </p:spPr>
+      </p:sp>
+      <p:pic>
+        <p:nvPicPr>
+          <p:cNvPr id="20" name="Image 2" descr="/home/user/analizator-bot/talks/2026-08-06-prodavay-kak-faunder/assets/ic-com.png">    </p:cNvPr>
+          <p:cNvPicPr>
+            <a:picLocks noChangeAspect="1"/>
+          </p:cNvPicPr>
+          <p:nvPr/>
+        </p:nvPicPr>
+        <p:blipFill>
+          <a:blip r:embed="rId4"/>
+          <a:stretch>
+            <a:fillRect/>
+          </a:stretch>
+        </p:blipFill>
+        <p:spPr>
+          <a:xfrm>
+            <a:off x="8570488" y="2261128"/>
+            <a:ext cx="342351" cy="342351"/>
+          </a:xfrm>
+          <a:prstGeom prst="rect">
+            <a:avLst/>
+          </a:prstGeom>
+        </p:spPr>
+      </p:pic>
+      <p:sp>
+        <p:nvSpPr>
+          <p:cNvPr id="21" name="Text 15"/>
+          <p:cNvSpPr/>
+          <p:nvPr/>
+        </p:nvSpPr>
+        <p:spPr>
+          <a:xfrm>
+            <a:off x="8412480" y="2880360"/>
             <a:ext cx="2834640" cy="411480"/>
           </a:xfrm>
           <a:prstGeom prst="rect">
@@ -32103,13 +32854,13 @@
       </p:sp>
       <p:sp>
         <p:nvSpPr>
-          <p:cNvPr id="19" name="Text 16"/>
-          <p:cNvSpPr/>
-          <p:nvPr/>
-        </p:nvSpPr>
-        <p:spPr>
-          <a:xfrm>
-            <a:off x="8412480" y="2926080"/>
+          <p:cNvPr id="22" name="Text 16"/>
+          <p:cNvSpPr/>
+          <p:nvPr/>
+        </p:nvSpPr>
+        <p:spPr>
+          <a:xfrm>
+            <a:off x="8412480" y="3291840"/>
             <a:ext cx="2834640" cy="320040"/>
           </a:xfrm>
           <a:prstGeom prst="rect">
@@ -32142,13 +32893,13 @@
       </p:sp>
       <p:sp>
         <p:nvSpPr>
-          <p:cNvPr id="20" name="Text 17"/>
-          <p:cNvSpPr/>
-          <p:nvPr/>
-        </p:nvSpPr>
-        <p:spPr>
-          <a:xfrm>
-            <a:off x="8412480" y="3429000"/>
+          <p:cNvPr id="23" name="Text 17"/>
+          <p:cNvSpPr/>
+          <p:nvPr/>
+        </p:nvSpPr>
+        <p:spPr>
+          <a:xfrm>
+            <a:off x="8412480" y="3749040"/>
             <a:ext cx="2834640" cy="914400"/>
           </a:xfrm>
           <a:prstGeom prst="rect">
@@ -32204,13 +32955,13 @@
       </p:sp>
       <p:sp>
         <p:nvSpPr>
-          <p:cNvPr id="21" name="Text 18"/>
-          <p:cNvSpPr/>
-          <p:nvPr/>
-        </p:nvSpPr>
-        <p:spPr>
-          <a:xfrm>
-            <a:off x="8412480" y="4617720"/>
+          <p:cNvPr id="24" name="Text 18"/>
+          <p:cNvSpPr/>
+          <p:nvPr/>
+        </p:nvSpPr>
+        <p:spPr>
+          <a:xfrm>
+            <a:off x="8412480" y="4754880"/>
             <a:ext cx="2834640" cy="457200"/>
           </a:xfrm>
           <a:prstGeom prst="rect">
@@ -32254,9 +33005,16 @@
   <p:cSld name="Slide 7">
     <p:bg>
       <p:bgPr>
-        <a:solidFill>
-          <a:srgbClr val="12141A"/>
-        </a:solidFill>
+        <a:blipFill dpi="0" rotWithShape="1">
+          <a:blip r:embed="rId1">
+            <a:lum/>
+          </a:blip>
+          <a:srcRect/>
+          <a:stretch>
+            <a:fillRect/>
+          </a:stretch>
+        </a:blipFill>
+        <a:effectLst/>
       </p:bgPr>
     </p:bg>
     <p:spTree>
@@ -32794,9 +33552,16 @@
   <p:cSld name="Slide 8">
     <p:bg>
       <p:bgPr>
-        <a:solidFill>
-          <a:srgbClr val="12141A"/>
-        </a:solidFill>
+        <a:blipFill dpi="0" rotWithShape="1">
+          <a:blip r:embed="rId1">
+            <a:lum/>
+          </a:blip>
+          <a:srcRect/>
+          <a:stretch>
+            <a:fillRect/>
+          </a:stretch>
+        </a:blipFill>
+        <a:effectLst/>
       </p:bgPr>
     </p:bg>
     <p:spTree>
@@ -33827,9 +34592,16 @@
   <p:cSld name="Slide 9">
     <p:bg>
       <p:bgPr>
-        <a:solidFill>
-          <a:srgbClr val="12141A"/>
-        </a:solidFill>
+        <a:blipFill dpi="0" rotWithShape="1">
+          <a:blip r:embed="rId1">
+            <a:lum/>
+          </a:blip>
+          <a:srcRect/>
+          <a:stretch>
+            <a:fillRect/>
+          </a:stretch>
+        </a:blipFill>
+        <a:effectLst/>
       </p:bgPr>
     </p:bg>
     <p:spTree>

--- a/talks/2026-08-06-prodavay-kak-faunder/Как-выигрывать-тендеры.pptx
+++ b/talks/2026-08-06-prodavay-kak-faunder/Как-выигрывать-тендеры.pptx
@@ -4327,16 +4327,9 @@
   <p:cSld name="Slide 1">
     <p:bg>
       <p:bgPr>
-        <a:blipFill dpi="0" rotWithShape="1">
-          <a:blip r:embed="rId1">
-            <a:lum/>
-          </a:blip>
-          <a:srcRect/>
-          <a:stretch>
-            <a:fillRect/>
-          </a:stretch>
-        </a:blipFill>
-        <a:effectLst/>
+        <a:solidFill>
+          <a:srgbClr val="12141A"/>
+        </a:solidFill>
       </p:bgPr>
     </p:bg>
     <p:spTree>
@@ -4545,16 +4538,9 @@
   <p:cSld name="Slide 10">
     <p:bg>
       <p:bgPr>
-        <a:blipFill dpi="0" rotWithShape="1">
-          <a:blip r:embed="rId1">
-            <a:lum/>
-          </a:blip>
-          <a:srcRect/>
-          <a:stretch>
-            <a:fillRect/>
-          </a:stretch>
-        </a:blipFill>
-        <a:effectLst/>
+        <a:solidFill>
+          <a:srgbClr val="12141A"/>
+        </a:solidFill>
       </p:bgPr>
     </p:bg>
     <p:spTree>
@@ -5774,16 +5760,9 @@
   <p:cSld name="Slide 11">
     <p:bg>
       <p:bgPr>
-        <a:blipFill dpi="0" rotWithShape="1">
-          <a:blip r:embed="rId1">
-            <a:lum/>
-          </a:blip>
-          <a:srcRect/>
-          <a:stretch>
-            <a:fillRect/>
-          </a:stretch>
-        </a:blipFill>
-        <a:effectLst/>
+        <a:solidFill>
+          <a:srgbClr val="12141A"/>
+        </a:solidFill>
       </p:bgPr>
     </p:bg>
     <p:spTree>
@@ -6262,16 +6241,9 @@
   <p:cSld name="Slide 12">
     <p:bg>
       <p:bgPr>
-        <a:blipFill dpi="0" rotWithShape="1">
-          <a:blip r:embed="rId1">
-            <a:lum/>
-          </a:blip>
-          <a:srcRect/>
-          <a:stretch>
-            <a:fillRect/>
-          </a:stretch>
-        </a:blipFill>
-        <a:effectLst/>
+        <a:solidFill>
+          <a:srgbClr val="12141A"/>
+        </a:solidFill>
       </p:bgPr>
     </p:bg>
     <p:spTree>
@@ -6770,16 +6742,9 @@
   <p:cSld name="Slide 13">
     <p:bg>
       <p:bgPr>
-        <a:blipFill dpi="0" rotWithShape="1">
-          <a:blip r:embed="rId1">
-            <a:lum/>
-          </a:blip>
-          <a:srcRect/>
-          <a:stretch>
-            <a:fillRect/>
-          </a:stretch>
-        </a:blipFill>
-        <a:effectLst/>
+        <a:solidFill>
+          <a:srgbClr val="12141A"/>
+        </a:solidFill>
       </p:bgPr>
     </p:bg>
     <p:spTree>
@@ -6989,16 +6954,9 @@
   <p:cSld name="Slide 14">
     <p:bg>
       <p:bgPr>
-        <a:blipFill dpi="0" rotWithShape="1">
-          <a:blip r:embed="rId1">
-            <a:lum/>
-          </a:blip>
-          <a:srcRect/>
-          <a:stretch>
-            <a:fillRect/>
-          </a:stretch>
-        </a:blipFill>
-        <a:effectLst/>
+        <a:solidFill>
+          <a:srgbClr val="12141A"/>
+        </a:solidFill>
       </p:bgPr>
     </p:bg>
     <p:spTree>
@@ -8029,16 +7987,9 @@
   <p:cSld name="Slide 15">
     <p:bg>
       <p:bgPr>
-        <a:blipFill dpi="0" rotWithShape="1">
-          <a:blip r:embed="rId1">
-            <a:lum/>
-          </a:blip>
-          <a:srcRect/>
-          <a:stretch>
-            <a:fillRect/>
-          </a:stretch>
-        </a:blipFill>
-        <a:effectLst/>
+        <a:solidFill>
+          <a:srgbClr val="12141A"/>
+        </a:solidFill>
       </p:bgPr>
     </p:bg>
     <p:spTree>
@@ -9063,16 +9014,9 @@
   <p:cSld name="Slide 16">
     <p:bg>
       <p:bgPr>
-        <a:blipFill dpi="0" rotWithShape="1">
-          <a:blip r:embed="rId1">
-            <a:lum/>
-          </a:blip>
-          <a:srcRect/>
-          <a:stretch>
-            <a:fillRect/>
-          </a:stretch>
-        </a:blipFill>
-        <a:effectLst/>
+        <a:solidFill>
+          <a:srgbClr val="12141A"/>
+        </a:solidFill>
       </p:bgPr>
     </p:bg>
     <p:spTree>
@@ -9551,16 +9495,9 @@
   <p:cSld name="Slide 17">
     <p:bg>
       <p:bgPr>
-        <a:blipFill dpi="0" rotWithShape="1">
-          <a:blip r:embed="rId1">
-            <a:lum/>
-          </a:blip>
-          <a:srcRect/>
-          <a:stretch>
-            <a:fillRect/>
-          </a:stretch>
-        </a:blipFill>
-        <a:effectLst/>
+        <a:solidFill>
+          <a:srgbClr val="12141A"/>
+        </a:solidFill>
       </p:bgPr>
     </p:bg>
     <p:spTree>
@@ -10115,16 +10052,9 @@
   <p:cSld name="Slide 18">
     <p:bg>
       <p:bgPr>
-        <a:blipFill dpi="0" rotWithShape="1">
-          <a:blip r:embed="rId1">
-            <a:lum/>
-          </a:blip>
-          <a:srcRect/>
-          <a:stretch>
-            <a:fillRect/>
-          </a:stretch>
-        </a:blipFill>
-        <a:effectLst/>
+        <a:solidFill>
+          <a:srgbClr val="12141A"/>
+        </a:solidFill>
       </p:bgPr>
     </p:bg>
     <p:spTree>
@@ -13922,16 +13852,9 @@
   <p:cSld name="Slide 19">
     <p:bg>
       <p:bgPr>
-        <a:blipFill dpi="0" rotWithShape="1">
-          <a:blip r:embed="rId1">
-            <a:lum/>
-          </a:blip>
-          <a:srcRect/>
-          <a:stretch>
-            <a:fillRect/>
-          </a:stretch>
-        </a:blipFill>
-        <a:effectLst/>
+        <a:solidFill>
+          <a:srgbClr val="12141A"/>
+        </a:solidFill>
       </p:bgPr>
     </p:bg>
     <p:spTree>
@@ -14110,12 +14033,12 @@
         </p:nvSpPr>
         <p:spPr>
           <a:xfrm>
-            <a:off x="777240" y="2560320"/>
-            <a:ext cx="3337560" cy="685800"/>
+            <a:off x="777240" y="2606040"/>
+            <a:ext cx="3337560" cy="621792"/>
           </a:xfrm>
           <a:prstGeom prst="roundRect">
             <a:avLst>
-              <a:gd name="adj" fmla="val 10667"/>
+              <a:gd name="adj" fmla="val 11765"/>
             </a:avLst>
           </a:prstGeom>
           <a:solidFill>
@@ -14131,74 +14054,30 @@
       </p:sp>
       <p:sp>
         <p:nvSpPr>
-          <p:cNvPr id="8" name="Shape 5"/>
-          <p:cNvSpPr/>
-          <p:nvPr/>
-        </p:nvSpPr>
-        <p:spPr>
-          <a:xfrm>
-            <a:off x="960120" y="2679192"/>
-            <a:ext cx="448056" cy="448056"/>
-          </a:xfrm>
-          <a:prstGeom prst="ellipse">
-            <a:avLst/>
-          </a:prstGeom>
-          <a:solidFill>
-            <a:srgbClr val="2A2F3D"/>
-          </a:solidFill>
-          <a:ln/>
-        </p:spPr>
-      </p:sp>
-      <p:pic>
-        <p:nvPicPr>
-          <p:cNvPr id="9" name="Image 0" descr="/home/user/analizator-bot/talks/2026-08-06-prodavay-kak-faunder/assets/ic-history.png">    </p:cNvPr>
-          <p:cNvPicPr>
-            <a:picLocks noChangeAspect="1"/>
-          </p:cNvPicPr>
-          <p:nvPr/>
-        </p:nvPicPr>
-        <p:blipFill>
-          <a:blip r:embed="rId2"/>
-          <a:stretch>
-            <a:fillRect/>
-          </a:stretch>
-        </p:blipFill>
-        <p:spPr>
-          <a:xfrm>
-            <a:off x="1067653" y="2786725"/>
-            <a:ext cx="232989" cy="232989"/>
-          </a:xfrm>
-          <a:prstGeom prst="rect">
-            <a:avLst/>
-          </a:prstGeom>
-        </p:spPr>
-      </p:pic>
-      <p:sp>
-        <p:nvSpPr>
-          <p:cNvPr id="10" name="Text 6"/>
-          <p:cNvSpPr/>
-          <p:nvPr/>
-        </p:nvSpPr>
-        <p:spPr>
-          <a:xfrm>
-            <a:off x="1527048" y="2679192"/>
-            <a:ext cx="2423160" cy="457200"/>
-          </a:xfrm>
-          <a:prstGeom prst="rect">
-            <a:avLst/>
-          </a:prstGeom>
-          <a:noFill/>
-          <a:ln/>
-        </p:spPr>
-        <p:txBody>
-          <a:bodyPr wrap="square" lIns="0" tIns="0" rIns="0" bIns="0" rtlCol="0" anchor="ctr"/>
-          <a:lstStyle/>
-          <a:p>
-            <a:pPr indent="0" marL="0">
-              <a:buNone/>
-            </a:pPr>
-            <a:r>
-              <a:rPr lang="en-US" sz="1400" dirty="0">
+          <p:cNvPr id="8" name="Text 5"/>
+          <p:cNvSpPr/>
+          <p:nvPr/>
+        </p:nvSpPr>
+        <p:spPr>
+          <a:xfrm>
+            <a:off x="1033272" y="2715768"/>
+            <a:ext cx="2880360" cy="411480"/>
+          </a:xfrm>
+          <a:prstGeom prst="rect">
+            <a:avLst/>
+          </a:prstGeom>
+          <a:noFill/>
+          <a:ln/>
+        </p:spPr>
+        <p:txBody>
+          <a:bodyPr wrap="square" lIns="0" tIns="0" rIns="0" bIns="0" rtlCol="0" anchor="ctr"/>
+          <a:lstStyle/>
+          <a:p>
+            <a:pPr indent="0" marL="0">
+              <a:buNone/>
+            </a:pPr>
+            <a:r>
+              <a:rPr lang="en-US" sz="1500" dirty="0">
                 <a:solidFill>
                   <a:srgbClr val="F2F4F8"/>
                 </a:solidFill>
@@ -14208,24 +14087,24 @@
               </a:rPr>
               <a:t>История компании</a:t>
             </a:r>
-            <a:endParaRPr lang="en-US" sz="1400" dirty="0"/>
-          </a:p>
-        </p:txBody>
-      </p:sp>
-      <p:sp>
-        <p:nvSpPr>
-          <p:cNvPr id="11" name="Shape 7"/>
-          <p:cNvSpPr/>
-          <p:nvPr/>
-        </p:nvSpPr>
-        <p:spPr>
-          <a:xfrm>
-            <a:off x="4389120" y="2560320"/>
-            <a:ext cx="3337560" cy="685800"/>
+            <a:endParaRPr lang="en-US" sz="1500" dirty="0"/>
+          </a:p>
+        </p:txBody>
+      </p:sp>
+      <p:sp>
+        <p:nvSpPr>
+          <p:cNvPr id="9" name="Shape 6"/>
+          <p:cNvSpPr/>
+          <p:nvPr/>
+        </p:nvSpPr>
+        <p:spPr>
+          <a:xfrm>
+            <a:off x="4389120" y="2606040"/>
+            <a:ext cx="3337560" cy="621792"/>
           </a:xfrm>
           <a:prstGeom prst="roundRect">
             <a:avLst>
-              <a:gd name="adj" fmla="val 10667"/>
+              <a:gd name="adj" fmla="val 11765"/>
             </a:avLst>
           </a:prstGeom>
           <a:solidFill>
@@ -14241,74 +14120,30 @@
       </p:sp>
       <p:sp>
         <p:nvSpPr>
-          <p:cNvPr id="12" name="Shape 8"/>
-          <p:cNvSpPr/>
-          <p:nvPr/>
-        </p:nvSpPr>
-        <p:spPr>
-          <a:xfrm>
-            <a:off x="4572000" y="2679192"/>
-            <a:ext cx="448056" cy="448056"/>
-          </a:xfrm>
-          <a:prstGeom prst="ellipse">
-            <a:avLst/>
-          </a:prstGeom>
-          <a:solidFill>
-            <a:srgbClr val="2A2F3D"/>
-          </a:solidFill>
-          <a:ln/>
-        </p:spPr>
-      </p:sp>
-      <p:pic>
-        <p:nvPicPr>
-          <p:cNvPr id="13" name="Image 1" descr="/home/user/analizator-bot/talks/2026-08-06-prodavay-kak-faunder/assets/ic-contract.png">    </p:cNvPr>
-          <p:cNvPicPr>
-            <a:picLocks noChangeAspect="1"/>
-          </p:cNvPicPr>
-          <p:nvPr/>
-        </p:nvPicPr>
-        <p:blipFill>
-          <a:blip r:embed="rId3"/>
-          <a:stretch>
-            <a:fillRect/>
-          </a:stretch>
-        </p:blipFill>
-        <p:spPr>
-          <a:xfrm>
-            <a:off x="4679533" y="2786725"/>
-            <a:ext cx="232989" cy="232989"/>
-          </a:xfrm>
-          <a:prstGeom prst="rect">
-            <a:avLst/>
-          </a:prstGeom>
-        </p:spPr>
-      </p:pic>
-      <p:sp>
-        <p:nvSpPr>
-          <p:cNvPr id="14" name="Text 9"/>
-          <p:cNvSpPr/>
-          <p:nvPr/>
-        </p:nvSpPr>
-        <p:spPr>
-          <a:xfrm>
-            <a:off x="5138928" y="2679192"/>
-            <a:ext cx="2423160" cy="457200"/>
-          </a:xfrm>
-          <a:prstGeom prst="rect">
-            <a:avLst/>
-          </a:prstGeom>
-          <a:noFill/>
-          <a:ln/>
-        </p:spPr>
-        <p:txBody>
-          <a:bodyPr wrap="square" lIns="0" tIns="0" rIns="0" bIns="0" rtlCol="0" anchor="ctr"/>
-          <a:lstStyle/>
-          <a:p>
-            <a:pPr indent="0" marL="0">
-              <a:buNone/>
-            </a:pPr>
-            <a:r>
-              <a:rPr lang="en-US" sz="1400" dirty="0">
+          <p:cNvPr id="10" name="Text 7"/>
+          <p:cNvSpPr/>
+          <p:nvPr/>
+        </p:nvSpPr>
+        <p:spPr>
+          <a:xfrm>
+            <a:off x="4645152" y="2715768"/>
+            <a:ext cx="2880360" cy="411480"/>
+          </a:xfrm>
+          <a:prstGeom prst="rect">
+            <a:avLst/>
+          </a:prstGeom>
+          <a:noFill/>
+          <a:ln/>
+        </p:spPr>
+        <p:txBody>
+          <a:bodyPr wrap="square" lIns="0" tIns="0" rIns="0" bIns="0" rtlCol="0" anchor="ctr"/>
+          <a:lstStyle/>
+          <a:p>
+            <a:pPr indent="0" marL="0">
+              <a:buNone/>
+            </a:pPr>
+            <a:r>
+              <a:rPr lang="en-US" sz="1500" dirty="0">
                 <a:solidFill>
                   <a:srgbClr val="F2F4F8"/>
                 </a:solidFill>
@@ -14318,24 +14153,24 @@
               </a:rPr>
               <a:t>Исполненные контракты</a:t>
             </a:r>
-            <a:endParaRPr lang="en-US" sz="1400" dirty="0"/>
-          </a:p>
-        </p:txBody>
-      </p:sp>
-      <p:sp>
-        <p:nvSpPr>
-          <p:cNvPr id="15" name="Shape 10"/>
-          <p:cNvSpPr/>
-          <p:nvPr/>
-        </p:nvSpPr>
-        <p:spPr>
-          <a:xfrm>
-            <a:off x="8001000" y="2560320"/>
-            <a:ext cx="3337560" cy="685800"/>
+            <a:endParaRPr lang="en-US" sz="1500" dirty="0"/>
+          </a:p>
+        </p:txBody>
+      </p:sp>
+      <p:sp>
+        <p:nvSpPr>
+          <p:cNvPr id="11" name="Shape 8"/>
+          <p:cNvSpPr/>
+          <p:nvPr/>
+        </p:nvSpPr>
+        <p:spPr>
+          <a:xfrm>
+            <a:off x="8001000" y="2606040"/>
+            <a:ext cx="3337560" cy="621792"/>
           </a:xfrm>
           <a:prstGeom prst="roundRect">
             <a:avLst>
-              <a:gd name="adj" fmla="val 10667"/>
+              <a:gd name="adj" fmla="val 11765"/>
             </a:avLst>
           </a:prstGeom>
           <a:solidFill>
@@ -14351,74 +14186,30 @@
       </p:sp>
       <p:sp>
         <p:nvSpPr>
-          <p:cNvPr id="16" name="Shape 11"/>
-          <p:cNvSpPr/>
-          <p:nvPr/>
-        </p:nvSpPr>
-        <p:spPr>
-          <a:xfrm>
-            <a:off x="8183880" y="2679192"/>
-            <a:ext cx="448056" cy="448056"/>
-          </a:xfrm>
-          <a:prstGeom prst="ellipse">
-            <a:avLst/>
-          </a:prstGeom>
-          <a:solidFill>
-            <a:srgbClr val="2A2F3D"/>
-          </a:solidFill>
-          <a:ln/>
-        </p:spPr>
-      </p:sp>
-      <p:pic>
-        <p:nvPicPr>
-          <p:cNvPr id="17" name="Image 2" descr="/home/user/analizator-bot/talks/2026-08-06-prodavay-kak-faunder/assets/ic-folder.png">    </p:cNvPr>
-          <p:cNvPicPr>
-            <a:picLocks noChangeAspect="1"/>
-          </p:cNvPicPr>
-          <p:nvPr/>
-        </p:nvPicPr>
-        <p:blipFill>
-          <a:blip r:embed="rId4"/>
-          <a:stretch>
-            <a:fillRect/>
-          </a:stretch>
-        </p:blipFill>
-        <p:spPr>
-          <a:xfrm>
-            <a:off x="8291413" y="2786725"/>
-            <a:ext cx="232989" cy="232989"/>
-          </a:xfrm>
-          <a:prstGeom prst="rect">
-            <a:avLst/>
-          </a:prstGeom>
-        </p:spPr>
-      </p:pic>
-      <p:sp>
-        <p:nvSpPr>
-          <p:cNvPr id="18" name="Text 12"/>
-          <p:cNvSpPr/>
-          <p:nvPr/>
-        </p:nvSpPr>
-        <p:spPr>
-          <a:xfrm>
-            <a:off x="8750808" y="2679192"/>
-            <a:ext cx="2423160" cy="457200"/>
-          </a:xfrm>
-          <a:prstGeom prst="rect">
-            <a:avLst/>
-          </a:prstGeom>
-          <a:noFill/>
-          <a:ln/>
-        </p:spPr>
-        <p:txBody>
-          <a:bodyPr wrap="square" lIns="0" tIns="0" rIns="0" bIns="0" rtlCol="0" anchor="ctr"/>
-          <a:lstStyle/>
-          <a:p>
-            <a:pPr indent="0" marL="0">
-              <a:buNone/>
-            </a:pPr>
-            <a:r>
-              <a:rPr lang="en-US" sz="1400" dirty="0">
+          <p:cNvPr id="12" name="Text 9"/>
+          <p:cNvSpPr/>
+          <p:nvPr/>
+        </p:nvSpPr>
+        <p:spPr>
+          <a:xfrm>
+            <a:off x="8257032" y="2715768"/>
+            <a:ext cx="2880360" cy="411480"/>
+          </a:xfrm>
+          <a:prstGeom prst="rect">
+            <a:avLst/>
+          </a:prstGeom>
+          <a:noFill/>
+          <a:ln/>
+        </p:spPr>
+        <p:txBody>
+          <a:bodyPr wrap="square" lIns="0" tIns="0" rIns="0" bIns="0" rtlCol="0" anchor="ctr"/>
+          <a:lstStyle/>
+          <a:p>
+            <a:pPr indent="0" marL="0">
+              <a:buNone/>
+            </a:pPr>
+            <a:r>
+              <a:rPr lang="en-US" sz="1500" dirty="0">
                 <a:solidFill>
                   <a:srgbClr val="F2F4F8"/>
                 </a:solidFill>
@@ -14428,24 +14219,24 @@
               </a:rPr>
               <a:t>Портфолио и кейсы</a:t>
             </a:r>
-            <a:endParaRPr lang="en-US" sz="1400" dirty="0"/>
-          </a:p>
-        </p:txBody>
-      </p:sp>
-      <p:sp>
-        <p:nvSpPr>
-          <p:cNvPr id="19" name="Shape 13"/>
-          <p:cNvSpPr/>
-          <p:nvPr/>
-        </p:nvSpPr>
-        <p:spPr>
-          <a:xfrm>
-            <a:off x="777240" y="3401568"/>
-            <a:ext cx="3337560" cy="685800"/>
+            <a:endParaRPr lang="en-US" sz="1500" dirty="0"/>
+          </a:p>
+        </p:txBody>
+      </p:sp>
+      <p:sp>
+        <p:nvSpPr>
+          <p:cNvPr id="13" name="Shape 10"/>
+          <p:cNvSpPr/>
+          <p:nvPr/>
+        </p:nvSpPr>
+        <p:spPr>
+          <a:xfrm>
+            <a:off x="777240" y="3383280"/>
+            <a:ext cx="3337560" cy="621792"/>
           </a:xfrm>
           <a:prstGeom prst="roundRect">
             <a:avLst>
-              <a:gd name="adj" fmla="val 10667"/>
+              <a:gd name="adj" fmla="val 11765"/>
             </a:avLst>
           </a:prstGeom>
           <a:solidFill>
@@ -14461,74 +14252,30 @@
       </p:sp>
       <p:sp>
         <p:nvSpPr>
-          <p:cNvPr id="20" name="Shape 14"/>
-          <p:cNvSpPr/>
-          <p:nvPr/>
-        </p:nvSpPr>
-        <p:spPr>
-          <a:xfrm>
-            <a:off x="960120" y="3520440"/>
-            <a:ext cx="448056" cy="448056"/>
-          </a:xfrm>
-          <a:prstGeom prst="ellipse">
-            <a:avLst/>
-          </a:prstGeom>
-          <a:solidFill>
-            <a:srgbClr val="2A2F3D"/>
-          </a:solidFill>
-          <a:ln/>
-        </p:spPr>
-      </p:sp>
-      <p:pic>
-        <p:nvPicPr>
-          <p:cNvPr id="21" name="Image 3" descr="/home/user/analizator-bot/talks/2026-08-06-prodavay-kak-faunder/assets/ic-award.png">    </p:cNvPr>
-          <p:cNvPicPr>
-            <a:picLocks noChangeAspect="1"/>
-          </p:cNvPicPr>
-          <p:nvPr/>
-        </p:nvPicPr>
-        <p:blipFill>
-          <a:blip r:embed="rId5"/>
-          <a:stretch>
-            <a:fillRect/>
-          </a:stretch>
-        </p:blipFill>
-        <p:spPr>
-          <a:xfrm>
-            <a:off x="1067653" y="3627973"/>
-            <a:ext cx="232989" cy="232989"/>
-          </a:xfrm>
-          <a:prstGeom prst="rect">
-            <a:avLst/>
-          </a:prstGeom>
-        </p:spPr>
-      </p:pic>
-      <p:sp>
-        <p:nvSpPr>
-          <p:cNvPr id="22" name="Text 15"/>
-          <p:cNvSpPr/>
-          <p:nvPr/>
-        </p:nvSpPr>
-        <p:spPr>
-          <a:xfrm>
-            <a:off x="1527048" y="3520440"/>
-            <a:ext cx="2423160" cy="457200"/>
-          </a:xfrm>
-          <a:prstGeom prst="rect">
-            <a:avLst/>
-          </a:prstGeom>
-          <a:noFill/>
-          <a:ln/>
-        </p:spPr>
-        <p:txBody>
-          <a:bodyPr wrap="square" lIns="0" tIns="0" rIns="0" bIns="0" rtlCol="0" anchor="ctr"/>
-          <a:lstStyle/>
-          <a:p>
-            <a:pPr indent="0" marL="0">
-              <a:buNone/>
-            </a:pPr>
-            <a:r>
-              <a:rPr lang="en-US" sz="1400" dirty="0">
+          <p:cNvPr id="14" name="Text 11"/>
+          <p:cNvSpPr/>
+          <p:nvPr/>
+        </p:nvSpPr>
+        <p:spPr>
+          <a:xfrm>
+            <a:off x="1033272" y="3493008"/>
+            <a:ext cx="2880360" cy="411480"/>
+          </a:xfrm>
+          <a:prstGeom prst="rect">
+            <a:avLst/>
+          </a:prstGeom>
+          <a:noFill/>
+          <a:ln/>
+        </p:spPr>
+        <p:txBody>
+          <a:bodyPr wrap="square" lIns="0" tIns="0" rIns="0" bIns="0" rtlCol="0" anchor="ctr"/>
+          <a:lstStyle/>
+          <a:p>
+            <a:pPr indent="0" marL="0">
+              <a:buNone/>
+            </a:pPr>
+            <a:r>
+              <a:rPr lang="en-US" sz="1500" dirty="0">
                 <a:solidFill>
                   <a:srgbClr val="F2F4F8"/>
                 </a:solidFill>
@@ -14538,24 +14285,24 @@
               </a:rPr>
               <a:t>Рейтинги</a:t>
             </a:r>
-            <a:endParaRPr lang="en-US" sz="1400" dirty="0"/>
-          </a:p>
-        </p:txBody>
-      </p:sp>
-      <p:sp>
-        <p:nvSpPr>
-          <p:cNvPr id="23" name="Shape 16"/>
-          <p:cNvSpPr/>
-          <p:nvPr/>
-        </p:nvSpPr>
-        <p:spPr>
-          <a:xfrm>
-            <a:off x="4389120" y="3401568"/>
-            <a:ext cx="3337560" cy="685800"/>
+            <a:endParaRPr lang="en-US" sz="1500" dirty="0"/>
+          </a:p>
+        </p:txBody>
+      </p:sp>
+      <p:sp>
+        <p:nvSpPr>
+          <p:cNvPr id="15" name="Shape 12"/>
+          <p:cNvSpPr/>
+          <p:nvPr/>
+        </p:nvSpPr>
+        <p:spPr>
+          <a:xfrm>
+            <a:off x="4389120" y="3383280"/>
+            <a:ext cx="3337560" cy="621792"/>
           </a:xfrm>
           <a:prstGeom prst="roundRect">
             <a:avLst>
-              <a:gd name="adj" fmla="val 10667"/>
+              <a:gd name="adj" fmla="val 11765"/>
             </a:avLst>
           </a:prstGeom>
           <a:solidFill>
@@ -14571,74 +14318,30 @@
       </p:sp>
       <p:sp>
         <p:nvSpPr>
-          <p:cNvPr id="24" name="Shape 17"/>
-          <p:cNvSpPr/>
-          <p:nvPr/>
-        </p:nvSpPr>
-        <p:spPr>
-          <a:xfrm>
-            <a:off x="4572000" y="3520440"/>
-            <a:ext cx="448056" cy="448056"/>
-          </a:xfrm>
-          <a:prstGeom prst="ellipse">
-            <a:avLst/>
-          </a:prstGeom>
-          <a:solidFill>
-            <a:srgbClr val="2A2F3D"/>
-          </a:solidFill>
-          <a:ln/>
-        </p:spPr>
-      </p:sp>
-      <p:pic>
-        <p:nvPicPr>
-          <p:cNvPr id="25" name="Image 4" descr="/home/user/analizator-bot/talks/2026-08-06-prodavay-kak-faunder/assets/ic-team.png">    </p:cNvPr>
-          <p:cNvPicPr>
-            <a:picLocks noChangeAspect="1"/>
-          </p:cNvPicPr>
-          <p:nvPr/>
-        </p:nvPicPr>
-        <p:blipFill>
-          <a:blip r:embed="rId6"/>
-          <a:stretch>
-            <a:fillRect/>
-          </a:stretch>
-        </p:blipFill>
-        <p:spPr>
-          <a:xfrm>
-            <a:off x="4679533" y="3627973"/>
-            <a:ext cx="232989" cy="232989"/>
-          </a:xfrm>
-          <a:prstGeom prst="rect">
-            <a:avLst/>
-          </a:prstGeom>
-        </p:spPr>
-      </p:pic>
-      <p:sp>
-        <p:nvSpPr>
-          <p:cNvPr id="26" name="Text 18"/>
-          <p:cNvSpPr/>
-          <p:nvPr/>
-        </p:nvSpPr>
-        <p:spPr>
-          <a:xfrm>
-            <a:off x="5138928" y="3520440"/>
-            <a:ext cx="2423160" cy="457200"/>
-          </a:xfrm>
-          <a:prstGeom prst="rect">
-            <a:avLst/>
-          </a:prstGeom>
-          <a:noFill/>
-          <a:ln/>
-        </p:spPr>
-        <p:txBody>
-          <a:bodyPr wrap="square" lIns="0" tIns="0" rIns="0" bIns="0" rtlCol="0" anchor="ctr"/>
-          <a:lstStyle/>
-          <a:p>
-            <a:pPr indent="0" marL="0">
-              <a:buNone/>
-            </a:pPr>
-            <a:r>
-              <a:rPr lang="en-US" sz="1400" dirty="0">
+          <p:cNvPr id="16" name="Text 13"/>
+          <p:cNvSpPr/>
+          <p:nvPr/>
+        </p:nvSpPr>
+        <p:spPr>
+          <a:xfrm>
+            <a:off x="4645152" y="3493008"/>
+            <a:ext cx="2880360" cy="411480"/>
+          </a:xfrm>
+          <a:prstGeom prst="rect">
+            <a:avLst/>
+          </a:prstGeom>
+          <a:noFill/>
+          <a:ln/>
+        </p:spPr>
+        <p:txBody>
+          <a:bodyPr wrap="square" lIns="0" tIns="0" rIns="0" bIns="0" rtlCol="0" anchor="ctr"/>
+          <a:lstStyle/>
+          <a:p>
+            <a:pPr indent="0" marL="0">
+              <a:buNone/>
+            </a:pPr>
+            <a:r>
+              <a:rPr lang="en-US" sz="1500" dirty="0">
                 <a:solidFill>
                   <a:srgbClr val="F2F4F8"/>
                 </a:solidFill>
@@ -14648,24 +14351,24 @@
               </a:rPr>
               <a:t>Команда с именами</a:t>
             </a:r>
-            <a:endParaRPr lang="en-US" sz="1400" dirty="0"/>
-          </a:p>
-        </p:txBody>
-      </p:sp>
-      <p:sp>
-        <p:nvSpPr>
-          <p:cNvPr id="27" name="Shape 19"/>
-          <p:cNvSpPr/>
-          <p:nvPr/>
-        </p:nvSpPr>
-        <p:spPr>
-          <a:xfrm>
-            <a:off x="8001000" y="3401568"/>
-            <a:ext cx="3337560" cy="685800"/>
+            <a:endParaRPr lang="en-US" sz="1500" dirty="0"/>
+          </a:p>
+        </p:txBody>
+      </p:sp>
+      <p:sp>
+        <p:nvSpPr>
+          <p:cNvPr id="17" name="Shape 14"/>
+          <p:cNvSpPr/>
+          <p:nvPr/>
+        </p:nvSpPr>
+        <p:spPr>
+          <a:xfrm>
+            <a:off x="8001000" y="3383280"/>
+            <a:ext cx="3337560" cy="621792"/>
           </a:xfrm>
           <a:prstGeom prst="roundRect">
             <a:avLst>
-              <a:gd name="adj" fmla="val 10667"/>
+              <a:gd name="adj" fmla="val 11765"/>
             </a:avLst>
           </a:prstGeom>
           <a:solidFill>
@@ -14681,74 +14384,30 @@
       </p:sp>
       <p:sp>
         <p:nvSpPr>
-          <p:cNvPr id="28" name="Shape 20"/>
-          <p:cNvSpPr/>
-          <p:nvPr/>
-        </p:nvSpPr>
-        <p:spPr>
-          <a:xfrm>
-            <a:off x="8183880" y="3520440"/>
-            <a:ext cx="448056" cy="448056"/>
-          </a:xfrm>
-          <a:prstGeom prst="ellipse">
-            <a:avLst/>
-          </a:prstGeom>
-          <a:solidFill>
-            <a:srgbClr val="3A2A1C"/>
-          </a:solidFill>
-          <a:ln/>
-        </p:spPr>
-      </p:sp>
-      <p:pic>
-        <p:nvPicPr>
-          <p:cNvPr id="29" name="Image 5" descr="/home/user/analizator-bot/talks/2026-08-06-prodavay-kak-faunder/assets/ic-turnover.png">    </p:cNvPr>
-          <p:cNvPicPr>
-            <a:picLocks noChangeAspect="1"/>
-          </p:cNvPicPr>
-          <p:nvPr/>
-        </p:nvPicPr>
-        <p:blipFill>
-          <a:blip r:embed="rId7"/>
-          <a:stretch>
-            <a:fillRect/>
-          </a:stretch>
-        </p:blipFill>
-        <p:spPr>
-          <a:xfrm>
-            <a:off x="8291413" y="3627973"/>
-            <a:ext cx="232989" cy="232989"/>
-          </a:xfrm>
-          <a:prstGeom prst="rect">
-            <a:avLst/>
-          </a:prstGeom>
-        </p:spPr>
-      </p:pic>
-      <p:sp>
-        <p:nvSpPr>
-          <p:cNvPr id="30" name="Text 21"/>
-          <p:cNvSpPr/>
-          <p:nvPr/>
-        </p:nvSpPr>
-        <p:spPr>
-          <a:xfrm>
-            <a:off x="8750808" y="3520440"/>
-            <a:ext cx="2423160" cy="457200"/>
-          </a:xfrm>
-          <a:prstGeom prst="rect">
-            <a:avLst/>
-          </a:prstGeom>
-          <a:noFill/>
-          <a:ln/>
-        </p:spPr>
-        <p:txBody>
-          <a:bodyPr wrap="square" lIns="0" tIns="0" rIns="0" bIns="0" rtlCol="0" anchor="ctr"/>
-          <a:lstStyle/>
-          <a:p>
-            <a:pPr indent="0" marL="0">
-              <a:buNone/>
-            </a:pPr>
-            <a:r>
-              <a:rPr lang="en-US" sz="1400" b="1" dirty="0">
+          <p:cNvPr id="18" name="Text 15"/>
+          <p:cNvSpPr/>
+          <p:nvPr/>
+        </p:nvSpPr>
+        <p:spPr>
+          <a:xfrm>
+            <a:off x="8257032" y="3493008"/>
+            <a:ext cx="2880360" cy="411480"/>
+          </a:xfrm>
+          <a:prstGeom prst="rect">
+            <a:avLst/>
+          </a:prstGeom>
+          <a:noFill/>
+          <a:ln/>
+        </p:spPr>
+        <p:txBody>
+          <a:bodyPr wrap="square" lIns="0" tIns="0" rIns="0" bIns="0" rtlCol="0" anchor="ctr"/>
+          <a:lstStyle/>
+          <a:p>
+            <a:pPr indent="0" marL="0">
+              <a:buNone/>
+            </a:pPr>
+            <a:r>
+              <a:rPr lang="en-US" sz="1500" b="1" dirty="0">
                 <a:solidFill>
                   <a:srgbClr val="F0862E"/>
                 </a:solidFill>
@@ -14758,13 +14417,13 @@
               </a:rPr>
               <a:t>Обороты, свойственные отрасли</a:t>
             </a:r>
-            <a:endParaRPr lang="en-US" sz="1400" dirty="0"/>
-          </a:p>
-        </p:txBody>
-      </p:sp>
-      <p:sp>
-        <p:nvSpPr>
-          <p:cNvPr id="31" name="Text 22"/>
+            <a:endParaRPr lang="en-US" sz="1500" dirty="0"/>
+          </a:p>
+        </p:txBody>
+      </p:sp>
+      <p:sp>
+        <p:nvSpPr>
+          <p:cNvPr id="19" name="Text 16"/>
           <p:cNvSpPr/>
           <p:nvPr/>
         </p:nvSpPr>
@@ -14826,7 +14485,7 @@
       </p:sp>
       <p:sp>
         <p:nvSpPr>
-          <p:cNvPr id="32" name="Text 23"/>
+          <p:cNvPr id="20" name="Text 17"/>
           <p:cNvSpPr/>
           <p:nvPr/>
         </p:nvSpPr>
@@ -14876,16 +14535,9 @@
   <p:cSld name="Slide 2">
     <p:bg>
       <p:bgPr>
-        <a:blipFill dpi="0" rotWithShape="1">
-          <a:blip r:embed="rId1">
-            <a:lum/>
-          </a:blip>
-          <a:srcRect/>
-          <a:stretch>
-            <a:fillRect/>
-          </a:stretch>
-        </a:blipFill>
-        <a:effectLst/>
+        <a:solidFill>
+          <a:srgbClr val="12141A"/>
+        </a:solidFill>
       </p:bgPr>
     </p:bg>
     <p:spTree>
@@ -18438,16 +18090,9 @@
   <p:cSld name="Slide 20">
     <p:bg>
       <p:bgPr>
-        <a:blipFill dpi="0" rotWithShape="1">
-          <a:blip r:embed="rId1">
-            <a:lum/>
-          </a:blip>
-          <a:srcRect/>
-          <a:stretch>
-            <a:fillRect/>
-          </a:stretch>
-        </a:blipFill>
-        <a:effectLst/>
+        <a:solidFill>
+          <a:srgbClr val="12141A"/>
+        </a:solidFill>
       </p:bgPr>
     </p:bg>
     <p:spTree>
@@ -19472,16 +19117,9 @@
   <p:cSld name="Slide 21">
     <p:bg>
       <p:bgPr>
-        <a:blipFill dpi="0" rotWithShape="1">
-          <a:blip r:embed="rId1">
-            <a:lum/>
-          </a:blip>
-          <a:srcRect/>
-          <a:stretch>
-            <a:fillRect/>
-          </a:stretch>
-        </a:blipFill>
-        <a:effectLst/>
+        <a:solidFill>
+          <a:srgbClr val="12141A"/>
+        </a:solidFill>
       </p:bgPr>
     </p:bg>
     <p:spTree>
@@ -19691,16 +19329,9 @@
   <p:cSld name="Slide 22">
     <p:bg>
       <p:bgPr>
-        <a:blipFill dpi="0" rotWithShape="1">
-          <a:blip r:embed="rId1">
-            <a:lum/>
-          </a:blip>
-          <a:srcRect/>
-          <a:stretch>
-            <a:fillRect/>
-          </a:stretch>
-        </a:blipFill>
-        <a:effectLst/>
+        <a:solidFill>
+          <a:srgbClr val="12141A"/>
+        </a:solidFill>
       </p:bgPr>
     </p:bg>
     <p:spTree>
@@ -20024,16 +19655,9 @@
   <p:cSld name="Slide 23">
     <p:bg>
       <p:bgPr>
-        <a:blipFill dpi="0" rotWithShape="1">
-          <a:blip r:embed="rId1">
-            <a:lum/>
-          </a:blip>
-          <a:srcRect/>
-          <a:stretch>
-            <a:fillRect/>
-          </a:stretch>
-        </a:blipFill>
-        <a:effectLst/>
+        <a:solidFill>
+          <a:srgbClr val="12141A"/>
+        </a:solidFill>
       </p:bgPr>
     </p:bg>
     <p:spTree>
@@ -20856,16 +20480,9 @@
   <p:cSld name="Slide 24">
     <p:bg>
       <p:bgPr>
-        <a:blipFill dpi="0" rotWithShape="1">
-          <a:blip r:embed="rId1">
-            <a:lum/>
-          </a:blip>
-          <a:srcRect/>
-          <a:stretch>
-            <a:fillRect/>
-          </a:stretch>
-        </a:blipFill>
-        <a:effectLst/>
+        <a:solidFill>
+          <a:srgbClr val="12141A"/>
+        </a:solidFill>
       </p:bgPr>
     </p:bg>
     <p:spTree>
@@ -21376,16 +20993,9 @@
   <p:cSld name="Slide 25">
     <p:bg>
       <p:bgPr>
-        <a:blipFill dpi="0" rotWithShape="1">
-          <a:blip r:embed="rId1">
-            <a:lum/>
-          </a:blip>
-          <a:srcRect/>
-          <a:stretch>
-            <a:fillRect/>
-          </a:stretch>
-        </a:blipFill>
-        <a:effectLst/>
+        <a:solidFill>
+          <a:srgbClr val="12141A"/>
+        </a:solidFill>
       </p:bgPr>
     </p:bg>
     <p:spTree>
@@ -21808,16 +21418,9 @@
   <p:cSld name="Slide 26">
     <p:bg>
       <p:bgPr>
-        <a:blipFill dpi="0" rotWithShape="1">
-          <a:blip r:embed="rId1">
-            <a:lum/>
-          </a:blip>
-          <a:srcRect/>
-          <a:stretch>
-            <a:fillRect/>
-          </a:stretch>
-        </a:blipFill>
-        <a:effectLst/>
+        <a:solidFill>
+          <a:srgbClr val="12141A"/>
+        </a:solidFill>
       </p:bgPr>
     </p:bg>
     <p:spTree>
@@ -22413,16 +22016,9 @@
   <p:cSld name="Slide 27">
     <p:bg>
       <p:bgPr>
-        <a:blipFill dpi="0" rotWithShape="1">
-          <a:blip r:embed="rId1">
-            <a:lum/>
-          </a:blip>
-          <a:srcRect/>
-          <a:stretch>
-            <a:fillRect/>
-          </a:stretch>
-        </a:blipFill>
-        <a:effectLst/>
+        <a:solidFill>
+          <a:srgbClr val="12141A"/>
+        </a:solidFill>
       </p:bgPr>
     </p:bg>
     <p:spTree>
@@ -22612,16 +22208,9 @@
   <p:cSld name="Slide 28">
     <p:bg>
       <p:bgPr>
-        <a:blipFill dpi="0" rotWithShape="1">
-          <a:blip r:embed="rId1">
-            <a:lum/>
-          </a:blip>
-          <a:srcRect/>
-          <a:stretch>
-            <a:fillRect/>
-          </a:stretch>
-        </a:blipFill>
-        <a:effectLst/>
+        <a:solidFill>
+          <a:srgbClr val="12141A"/>
+        </a:solidFill>
       </p:bgPr>
     </p:bg>
     <p:spTree>
@@ -22870,16 +22459,9 @@
   <p:cSld name="Slide 29">
     <p:bg>
       <p:bgPr>
-        <a:blipFill dpi="0" rotWithShape="1">
-          <a:blip r:embed="rId1">
-            <a:lum/>
-          </a:blip>
-          <a:srcRect/>
-          <a:stretch>
-            <a:fillRect/>
-          </a:stretch>
-        </a:blipFill>
-        <a:effectLst/>
+        <a:solidFill>
+          <a:srgbClr val="12141A"/>
+        </a:solidFill>
       </p:bgPr>
     </p:bg>
     <p:spTree>
@@ -23549,16 +23131,9 @@
   <p:cSld name="Slide 3">
     <p:bg>
       <p:bgPr>
-        <a:blipFill dpi="0" rotWithShape="1">
-          <a:blip r:embed="rId1">
-            <a:lum/>
-          </a:blip>
-          <a:srcRect/>
-          <a:stretch>
-            <a:fillRect/>
-          </a:stretch>
-        </a:blipFill>
-        <a:effectLst/>
+        <a:solidFill>
+          <a:srgbClr val="12141A"/>
+        </a:solidFill>
       </p:bgPr>
     </p:bg>
     <p:spTree>
@@ -24178,16 +23753,9 @@
   <p:cSld name="Slide 30">
     <p:bg>
       <p:bgPr>
-        <a:blipFill dpi="0" rotWithShape="1">
-          <a:blip r:embed="rId1">
-            <a:lum/>
-          </a:blip>
-          <a:srcRect/>
-          <a:stretch>
-            <a:fillRect/>
-          </a:stretch>
-        </a:blipFill>
-        <a:effectLst/>
+        <a:solidFill>
+          <a:srgbClr val="12141A"/>
+        </a:solidFill>
       </p:bgPr>
     </p:bg>
     <p:spTree>
@@ -25122,16 +24690,9 @@
   <p:cSld name="Slide 31">
     <p:bg>
       <p:bgPr>
-        <a:blipFill dpi="0" rotWithShape="1">
-          <a:blip r:embed="rId1">
-            <a:lum/>
-          </a:blip>
-          <a:srcRect/>
-          <a:stretch>
-            <a:fillRect/>
-          </a:stretch>
-        </a:blipFill>
-        <a:effectLst/>
+        <a:solidFill>
+          <a:srgbClr val="12141A"/>
+        </a:solidFill>
       </p:bgPr>
     </p:bg>
     <p:spTree>
@@ -26301,16 +25862,9 @@
   <p:cSld name="Slide 32">
     <p:bg>
       <p:bgPr>
-        <a:blipFill dpi="0" rotWithShape="1">
-          <a:blip r:embed="rId1">
-            <a:lum/>
-          </a:blip>
-          <a:srcRect/>
-          <a:stretch>
-            <a:fillRect/>
-          </a:stretch>
-        </a:blipFill>
-        <a:effectLst/>
+        <a:solidFill>
+          <a:srgbClr val="12141A"/>
+        </a:solidFill>
       </p:bgPr>
     </p:bg>
     <p:spTree>
@@ -26928,16 +26482,9 @@
   <p:cSld name="Slide 33">
     <p:bg>
       <p:bgPr>
-        <a:blipFill dpi="0" rotWithShape="1">
-          <a:blip r:embed="rId1">
-            <a:lum/>
-          </a:blip>
-          <a:srcRect/>
-          <a:stretch>
-            <a:fillRect/>
-          </a:stretch>
-        </a:blipFill>
-        <a:effectLst/>
+        <a:solidFill>
+          <a:srgbClr val="12141A"/>
+        </a:solidFill>
       </p:bgPr>
     </p:bg>
     <p:spTree>
@@ -27607,16 +27154,9 @@
   <p:cSld name="Slide 34">
     <p:bg>
       <p:bgPr>
-        <a:blipFill dpi="0" rotWithShape="1">
-          <a:blip r:embed="rId1">
-            <a:lum/>
-          </a:blip>
-          <a:srcRect/>
-          <a:stretch>
-            <a:fillRect/>
-          </a:stretch>
-        </a:blipFill>
-        <a:effectLst/>
+        <a:solidFill>
+          <a:srgbClr val="12141A"/>
+        </a:solidFill>
       </p:bgPr>
     </p:bg>
     <p:spTree>
@@ -27692,33 +27232,9 @@
           <a:ln/>
         </p:spPr>
       </p:sp>
-      <p:pic>
-        <p:nvPicPr>
-          <p:cNvPr id="5" name="Image 0" descr="/home/user/analizator-bot/talks/2026-08-06-prodavay-kak-faunder/assets/ic-truck.png">    </p:cNvPr>
-          <p:cNvPicPr>
-            <a:picLocks noChangeAspect="1"/>
-          </p:cNvPicPr>
-          <p:nvPr/>
-        </p:nvPicPr>
-        <p:blipFill>
-          <a:blip r:embed="rId2"/>
-          <a:stretch>
-            <a:fillRect/>
-          </a:stretch>
-        </p:blipFill>
-        <p:spPr>
-          <a:xfrm>
-            <a:off x="8778240" y="1737360"/>
-            <a:ext cx="2377440" cy="2377440"/>
-          </a:xfrm>
-          <a:prstGeom prst="rect">
-            <a:avLst/>
-          </a:prstGeom>
-        </p:spPr>
-      </p:pic>
-      <p:sp>
-        <p:nvSpPr>
-          <p:cNvPr id="6" name="Text 2"/>
+      <p:sp>
+        <p:nvSpPr>
+          <p:cNvPr id="5" name="Text 2"/>
           <p:cNvSpPr/>
           <p:nvPr/>
         </p:nvSpPr>
@@ -27739,12 +27255,12 @@
           <a:p>
             <a:pPr indent="0" marL="0">
               <a:lnSpc>
-                <a:spcPts val="4956"/>
+                <a:spcPts val="5428"/>
               </a:lnSpc>
               <a:buNone/>
             </a:pPr>
             <a:r>
-              <a:rPr lang="en-US" sz="4200" b="1" dirty="0">
+              <a:rPr lang="en-US" sz="4600" b="1" dirty="0">
                 <a:solidFill>
                   <a:srgbClr val="F2F4F8"/>
                 </a:solidFill>
@@ -27754,17 +27270,17 @@
               </a:rPr>
               <a:t>Один отчёт мы</a:t>
             </a:r>
-            <a:endParaRPr lang="en-US" sz="4200" dirty="0"/>
+            <a:endParaRPr lang="en-US" sz="4600" dirty="0"/>
           </a:p>
           <a:p>
             <a:pPr indent="0" marL="0">
               <a:lnSpc>
-                <a:spcPts val="4956"/>
+                <a:spcPts val="5428"/>
               </a:lnSpc>
               <a:buNone/>
             </a:pPr>
             <a:r>
-              <a:rPr lang="en-US" sz="4200" b="1" dirty="0">
+              <a:rPr lang="en-US" sz="4600" b="1" dirty="0">
                 <a:solidFill>
                   <a:srgbClr val="F2F4F8"/>
                 </a:solidFill>
@@ -27774,13 +27290,13 @@
               </a:rPr>
               <a:t>привозили на газели</a:t>
             </a:r>
-            <a:endParaRPr lang="en-US" sz="4200" dirty="0"/>
-          </a:p>
-        </p:txBody>
-      </p:sp>
-      <p:sp>
-        <p:nvSpPr>
-          <p:cNvPr id="7" name="Text 3"/>
+            <a:endParaRPr lang="en-US" sz="4600" dirty="0"/>
+          </a:p>
+        </p:txBody>
+      </p:sp>
+      <p:sp>
+        <p:nvSpPr>
+          <p:cNvPr id="6" name="Text 3"/>
           <p:cNvSpPr/>
           <p:nvPr/>
         </p:nvSpPr>
@@ -27819,7 +27335,7 @@
       </p:sp>
       <p:sp>
         <p:nvSpPr>
-          <p:cNvPr id="8" name="Text 4"/>
+          <p:cNvPr id="7" name="Text 4"/>
           <p:cNvSpPr/>
           <p:nvPr/>
         </p:nvSpPr>
@@ -27892,16 +27408,9 @@
   <p:cSld name="Slide 35">
     <p:bg>
       <p:bgPr>
-        <a:blipFill dpi="0" rotWithShape="1">
-          <a:blip r:embed="rId1">
-            <a:lum/>
-          </a:blip>
-          <a:srcRect/>
-          <a:stretch>
-            <a:fillRect/>
-          </a:stretch>
-        </a:blipFill>
-        <a:effectLst/>
+        <a:solidFill>
+          <a:srgbClr val="12141A"/>
+        </a:solidFill>
       </p:bgPr>
     </p:bg>
     <p:spTree>
@@ -28317,16 +27826,9 @@
   <p:cSld name="Slide 36">
     <p:bg>
       <p:bgPr>
-        <a:blipFill dpi="0" rotWithShape="1">
-          <a:blip r:embed="rId1">
-            <a:lum/>
-          </a:blip>
-          <a:srcRect/>
-          <a:stretch>
-            <a:fillRect/>
-          </a:stretch>
-        </a:blipFill>
-        <a:effectLst/>
+        <a:solidFill>
+          <a:srgbClr val="12141A"/>
+        </a:solidFill>
       </p:bgPr>
     </p:bg>
     <p:spTree>
@@ -29124,16 +28626,9 @@
   <p:cSld name="Slide 37">
     <p:bg>
       <p:bgPr>
-        <a:blipFill dpi="0" rotWithShape="1">
-          <a:blip r:embed="rId1">
-            <a:lum/>
-          </a:blip>
-          <a:srcRect/>
-          <a:stretch>
-            <a:fillRect/>
-          </a:stretch>
-        </a:blipFill>
-        <a:effectLst/>
+        <a:solidFill>
+          <a:srgbClr val="12141A"/>
+        </a:solidFill>
       </p:bgPr>
     </p:bg>
     <p:spTree>
@@ -29273,12 +28768,12 @@
         </p:nvSpPr>
         <p:spPr>
           <a:xfrm>
-            <a:off x="777240" y="2103120"/>
-            <a:ext cx="3337560" cy="2057400"/>
+            <a:off x="777240" y="2194560"/>
+            <a:ext cx="3337560" cy="1828800"/>
           </a:xfrm>
           <a:prstGeom prst="roundRect">
             <a:avLst>
-              <a:gd name="adj" fmla="val 3556"/>
+              <a:gd name="adj" fmla="val 4000"/>
             </a:avLst>
           </a:prstGeom>
           <a:solidFill>
@@ -29294,58 +28789,14 @@
       </p:sp>
       <p:sp>
         <p:nvSpPr>
-          <p:cNvPr id="7" name="Shape 4"/>
-          <p:cNvSpPr/>
-          <p:nvPr/>
-        </p:nvSpPr>
-        <p:spPr>
-          <a:xfrm>
-            <a:off x="1097280" y="2286000"/>
-            <a:ext cx="566928" cy="566928"/>
-          </a:xfrm>
-          <a:prstGeom prst="ellipse">
-            <a:avLst/>
-          </a:prstGeom>
-          <a:solidFill>
-            <a:srgbClr val="1E3328"/>
-          </a:solidFill>
-          <a:ln/>
-        </p:spPr>
-      </p:sp>
-      <p:pic>
-        <p:nvPicPr>
-          <p:cNvPr id="8" name="Image 0" descr="/home/user/analizator-bot/talks/2026-08-06-prodavay-kak-faunder/assets/ic-shield.png">    </p:cNvPr>
-          <p:cNvPicPr>
-            <a:picLocks noChangeAspect="1"/>
-          </p:cNvPicPr>
-          <p:nvPr/>
-        </p:nvPicPr>
-        <p:blipFill>
-          <a:blip r:embed="rId2"/>
-          <a:stretch>
-            <a:fillRect/>
-          </a:stretch>
-        </p:blipFill>
-        <p:spPr>
-          <a:xfrm>
-            <a:off x="1233343" y="2422063"/>
-            <a:ext cx="294803" cy="294803"/>
-          </a:xfrm>
-          <a:prstGeom prst="rect">
-            <a:avLst/>
-          </a:prstGeom>
-        </p:spPr>
-      </p:pic>
-      <p:sp>
-        <p:nvSpPr>
-          <p:cNvPr id="9" name="Text 5"/>
-          <p:cNvSpPr/>
-          <p:nvPr/>
-        </p:nvSpPr>
-        <p:spPr>
-          <a:xfrm>
-            <a:off x="1097280" y="2926080"/>
-            <a:ext cx="2743200" cy="685800"/>
+          <p:cNvPr id="7" name="Text 4"/>
+          <p:cNvSpPr/>
+          <p:nvPr/>
+        </p:nvSpPr>
+        <p:spPr>
+          <a:xfrm>
+            <a:off x="1097280" y="2377440"/>
+            <a:ext cx="2743200" cy="731520"/>
           </a:xfrm>
           <a:prstGeom prst="rect">
             <a:avLst/>
@@ -29359,12 +28810,12 @@
           <a:p>
             <a:pPr indent="0" marL="0">
               <a:lnSpc>
-                <a:spcPts val="2300"/>
+                <a:spcPts val="2400"/>
               </a:lnSpc>
               <a:buNone/>
             </a:pPr>
             <a:r>
-              <a:rPr lang="en-US" sz="1800" b="1" dirty="0">
+              <a:rPr lang="en-US" sz="1900" b="1" dirty="0">
                 <a:solidFill>
                   <a:srgbClr val="3DAE72"/>
                 </a:solidFill>
@@ -29374,17 +28825,17 @@
               </a:rPr>
               <a:t>Юридическая</a:t>
             </a:r>
-            <a:endParaRPr lang="en-US" sz="1800" dirty="0"/>
+            <a:endParaRPr lang="en-US" sz="1900" dirty="0"/>
           </a:p>
           <a:p>
             <a:pPr indent="0" marL="0">
               <a:lnSpc>
-                <a:spcPts val="2300"/>
+                <a:spcPts val="2400"/>
               </a:lnSpc>
               <a:buNone/>
             </a:pPr>
             <a:r>
-              <a:rPr lang="en-US" sz="1800" b="1" dirty="0">
+              <a:rPr lang="en-US" sz="1900" b="1" dirty="0">
                 <a:solidFill>
                   <a:srgbClr val="3DAE72"/>
                 </a:solidFill>
@@ -29394,20 +28845,20 @@
               </a:rPr>
               <a:t>проверка</a:t>
             </a:r>
-            <a:endParaRPr lang="en-US" sz="1800" dirty="0"/>
-          </a:p>
-        </p:txBody>
-      </p:sp>
-      <p:sp>
-        <p:nvSpPr>
-          <p:cNvPr id="10" name="Text 6"/>
-          <p:cNvSpPr/>
-          <p:nvPr/>
-        </p:nvSpPr>
-        <p:spPr>
-          <a:xfrm>
-            <a:off x="1097280" y="3611880"/>
-            <a:ext cx="2743200" cy="502920"/>
+            <a:endParaRPr lang="en-US" sz="1900" dirty="0"/>
+          </a:p>
+        </p:txBody>
+      </p:sp>
+      <p:sp>
+        <p:nvSpPr>
+          <p:cNvPr id="8" name="Text 5"/>
+          <p:cNvSpPr/>
+          <p:nvPr/>
+        </p:nvSpPr>
+        <p:spPr>
+          <a:xfrm>
+            <a:off x="1097280" y="3154680"/>
+            <a:ext cx="2743200" cy="731520"/>
           </a:xfrm>
           <a:prstGeom prst="rect">
             <a:avLst/>
@@ -29421,12 +28872,12 @@
           <a:p>
             <a:pPr indent="0" marL="0">
               <a:lnSpc>
-                <a:spcPts val="1600"/>
+                <a:spcPts val="1800"/>
               </a:lnSpc>
               <a:buNone/>
             </a:pPr>
             <a:r>
-              <a:rPr lang="en-US" sz="1200" dirty="0">
+              <a:rPr lang="en-US" sz="1300" dirty="0">
                 <a:solidFill>
                   <a:srgbClr val="97A0B5"/>
                 </a:solidFill>
@@ -29436,24 +28887,24 @@
               </a:rPr>
               <a:t>заказчик, история, арбитраж, РНП</a:t>
             </a:r>
-            <a:endParaRPr lang="en-US" sz="1200" dirty="0"/>
-          </a:p>
-        </p:txBody>
-      </p:sp>
-      <p:sp>
-        <p:nvSpPr>
-          <p:cNvPr id="11" name="Shape 7"/>
-          <p:cNvSpPr/>
-          <p:nvPr/>
-        </p:nvSpPr>
-        <p:spPr>
-          <a:xfrm>
-            <a:off x="4389120" y="2103120"/>
-            <a:ext cx="3337560" cy="2057400"/>
+            <a:endParaRPr lang="en-US" sz="1300" dirty="0"/>
+          </a:p>
+        </p:txBody>
+      </p:sp>
+      <p:sp>
+        <p:nvSpPr>
+          <p:cNvPr id="9" name="Shape 6"/>
+          <p:cNvSpPr/>
+          <p:nvPr/>
+        </p:nvSpPr>
+        <p:spPr>
+          <a:xfrm>
+            <a:off x="4389120" y="2194560"/>
+            <a:ext cx="3337560" cy="1828800"/>
           </a:xfrm>
           <a:prstGeom prst="roundRect">
             <a:avLst>
-              <a:gd name="adj" fmla="val 3556"/>
+              <a:gd name="adj" fmla="val 4000"/>
             </a:avLst>
           </a:prstGeom>
           <a:solidFill>
@@ -29469,58 +28920,14 @@
       </p:sp>
       <p:sp>
         <p:nvSpPr>
-          <p:cNvPr id="12" name="Shape 8"/>
-          <p:cNvSpPr/>
-          <p:nvPr/>
-        </p:nvSpPr>
-        <p:spPr>
-          <a:xfrm>
-            <a:off x="4709160" y="2286000"/>
-            <a:ext cx="566928" cy="566928"/>
-          </a:xfrm>
-          <a:prstGeom prst="ellipse">
-            <a:avLst/>
-          </a:prstGeom>
-          <a:solidFill>
-            <a:srgbClr val="1E3328"/>
-          </a:solidFill>
-          <a:ln/>
-        </p:spPr>
-      </p:sp>
-      <p:pic>
-        <p:nvPicPr>
-          <p:cNvPr id="13" name="Image 1" descr="/home/user/analizator-bot/talks/2026-08-06-prodavay-kak-faunder/assets/ic-search.png">    </p:cNvPr>
-          <p:cNvPicPr>
-            <a:picLocks noChangeAspect="1"/>
-          </p:cNvPicPr>
-          <p:nvPr/>
-        </p:nvPicPr>
-        <p:blipFill>
-          <a:blip r:embed="rId3"/>
-          <a:stretch>
-            <a:fillRect/>
-          </a:stretch>
-        </p:blipFill>
-        <p:spPr>
-          <a:xfrm>
-            <a:off x="4845223" y="2422063"/>
-            <a:ext cx="294803" cy="294803"/>
-          </a:xfrm>
-          <a:prstGeom prst="rect">
-            <a:avLst/>
-          </a:prstGeom>
-        </p:spPr>
-      </p:pic>
-      <p:sp>
-        <p:nvSpPr>
-          <p:cNvPr id="14" name="Text 9"/>
-          <p:cNvSpPr/>
-          <p:nvPr/>
-        </p:nvSpPr>
-        <p:spPr>
-          <a:xfrm>
-            <a:off x="4709160" y="2926080"/>
-            <a:ext cx="2743200" cy="685800"/>
+          <p:cNvPr id="10" name="Text 7"/>
+          <p:cNvSpPr/>
+          <p:nvPr/>
+        </p:nvSpPr>
+        <p:spPr>
+          <a:xfrm>
+            <a:off x="4709160" y="2377440"/>
+            <a:ext cx="2743200" cy="731520"/>
           </a:xfrm>
           <a:prstGeom prst="rect">
             <a:avLst/>
@@ -29534,12 +28941,12 @@
           <a:p>
             <a:pPr indent="0" marL="0">
               <a:lnSpc>
-                <a:spcPts val="2300"/>
+                <a:spcPts val="2400"/>
               </a:lnSpc>
               <a:buNone/>
             </a:pPr>
             <a:r>
-              <a:rPr lang="en-US" sz="1800" b="1" dirty="0">
+              <a:rPr lang="en-US" sz="1900" b="1" dirty="0">
                 <a:solidFill>
                   <a:srgbClr val="3DAE72"/>
                 </a:solidFill>
@@ -29549,17 +28956,17 @@
               </a:rPr>
               <a:t>Аналитика</a:t>
             </a:r>
-            <a:endParaRPr lang="en-US" sz="1800" dirty="0"/>
+            <a:endParaRPr lang="en-US" sz="1900" dirty="0"/>
           </a:p>
           <a:p>
             <a:pPr indent="0" marL="0">
               <a:lnSpc>
-                <a:spcPts val="2300"/>
+                <a:spcPts val="2400"/>
               </a:lnSpc>
               <a:buNone/>
             </a:pPr>
             <a:r>
-              <a:rPr lang="en-US" sz="1800" b="1" dirty="0">
+              <a:rPr lang="en-US" sz="1900" b="1" dirty="0">
                 <a:solidFill>
                   <a:srgbClr val="3DAE72"/>
                 </a:solidFill>
@@ -29569,20 +28976,20 @@
               </a:rPr>
               <a:t>ЕИС</a:t>
             </a:r>
-            <a:endParaRPr lang="en-US" sz="1800" dirty="0"/>
-          </a:p>
-        </p:txBody>
-      </p:sp>
-      <p:sp>
-        <p:nvSpPr>
-          <p:cNvPr id="15" name="Text 10"/>
-          <p:cNvSpPr/>
-          <p:nvPr/>
-        </p:nvSpPr>
-        <p:spPr>
-          <a:xfrm>
-            <a:off x="4709160" y="3611880"/>
-            <a:ext cx="2743200" cy="502920"/>
+            <a:endParaRPr lang="en-US" sz="1900" dirty="0"/>
+          </a:p>
+        </p:txBody>
+      </p:sp>
+      <p:sp>
+        <p:nvSpPr>
+          <p:cNvPr id="11" name="Text 8"/>
+          <p:cNvSpPr/>
+          <p:nvPr/>
+        </p:nvSpPr>
+        <p:spPr>
+          <a:xfrm>
+            <a:off x="4709160" y="3154680"/>
+            <a:ext cx="2743200" cy="731520"/>
           </a:xfrm>
           <a:prstGeom prst="rect">
             <a:avLst/>
@@ -29596,12 +29003,12 @@
           <a:p>
             <a:pPr indent="0" marL="0">
               <a:lnSpc>
-                <a:spcPts val="1600"/>
+                <a:spcPts val="1800"/>
               </a:lnSpc>
               <a:buNone/>
             </a:pPr>
             <a:r>
-              <a:rPr lang="en-US" sz="1200" dirty="0">
+              <a:rPr lang="en-US" sz="1300" dirty="0">
                 <a:solidFill>
                   <a:srgbClr val="97A0B5"/>
                 </a:solidFill>
@@ -29611,24 +29018,24 @@
               </a:rPr>
               <a:t>кто выигрывал, с каким снижением, что планируют</a:t>
             </a:r>
-            <a:endParaRPr lang="en-US" sz="1200" dirty="0"/>
-          </a:p>
-        </p:txBody>
-      </p:sp>
-      <p:sp>
-        <p:nvSpPr>
-          <p:cNvPr id="16" name="Shape 11"/>
-          <p:cNvSpPr/>
-          <p:nvPr/>
-        </p:nvSpPr>
-        <p:spPr>
-          <a:xfrm>
-            <a:off x="8001000" y="2103120"/>
-            <a:ext cx="3337560" cy="2057400"/>
+            <a:endParaRPr lang="en-US" sz="1300" dirty="0"/>
+          </a:p>
+        </p:txBody>
+      </p:sp>
+      <p:sp>
+        <p:nvSpPr>
+          <p:cNvPr id="12" name="Shape 9"/>
+          <p:cNvSpPr/>
+          <p:nvPr/>
+        </p:nvSpPr>
+        <p:spPr>
+          <a:xfrm>
+            <a:off x="8001000" y="2194560"/>
+            <a:ext cx="3337560" cy="1828800"/>
           </a:xfrm>
           <a:prstGeom prst="roundRect">
             <a:avLst>
-              <a:gd name="adj" fmla="val 3556"/>
+              <a:gd name="adj" fmla="val 4000"/>
             </a:avLst>
           </a:prstGeom>
           <a:solidFill>
@@ -29644,58 +29051,14 @@
       </p:sp>
       <p:sp>
         <p:nvSpPr>
-          <p:cNvPr id="17" name="Shape 12"/>
-          <p:cNvSpPr/>
-          <p:nvPr/>
-        </p:nvSpPr>
-        <p:spPr>
-          <a:xfrm>
-            <a:off x="8321040" y="2286000"/>
-            <a:ext cx="566928" cy="566928"/>
-          </a:xfrm>
-          <a:prstGeom prst="ellipse">
-            <a:avLst/>
-          </a:prstGeom>
-          <a:solidFill>
-            <a:srgbClr val="1E3328"/>
-          </a:solidFill>
-          <a:ln/>
-        </p:spPr>
-      </p:sp>
-      <p:pic>
-        <p:nvPicPr>
-          <p:cNvPr id="18" name="Image 2" descr="/home/user/analizator-bot/talks/2026-08-06-prodavay-kak-faunder/assets/ic-calc.png">    </p:cNvPr>
-          <p:cNvPicPr>
-            <a:picLocks noChangeAspect="1"/>
-          </p:cNvPicPr>
-          <p:nvPr/>
-        </p:nvPicPr>
-        <p:blipFill>
-          <a:blip r:embed="rId4"/>
-          <a:stretch>
-            <a:fillRect/>
-          </a:stretch>
-        </p:blipFill>
-        <p:spPr>
-          <a:xfrm>
-            <a:off x="8457103" y="2422063"/>
-            <a:ext cx="294803" cy="294803"/>
-          </a:xfrm>
-          <a:prstGeom prst="rect">
-            <a:avLst/>
-          </a:prstGeom>
-        </p:spPr>
-      </p:pic>
-      <p:sp>
-        <p:nvSpPr>
-          <p:cNvPr id="19" name="Text 13"/>
-          <p:cNvSpPr/>
-          <p:nvPr/>
-        </p:nvSpPr>
-        <p:spPr>
-          <a:xfrm>
-            <a:off x="8321040" y="2926080"/>
-            <a:ext cx="2743200" cy="685800"/>
+          <p:cNvPr id="13" name="Text 10"/>
+          <p:cNvSpPr/>
+          <p:nvPr/>
+        </p:nvSpPr>
+        <p:spPr>
+          <a:xfrm>
+            <a:off x="8321040" y="2377440"/>
+            <a:ext cx="2743200" cy="731520"/>
           </a:xfrm>
           <a:prstGeom prst="rect">
             <a:avLst/>
@@ -29709,12 +29072,12 @@
           <a:p>
             <a:pPr indent="0" marL="0">
               <a:lnSpc>
-                <a:spcPts val="2300"/>
+                <a:spcPts val="2400"/>
               </a:lnSpc>
               <a:buNone/>
             </a:pPr>
             <a:r>
-              <a:rPr lang="en-US" sz="1800" b="1" dirty="0">
+              <a:rPr lang="en-US" sz="1900" b="1" dirty="0">
                 <a:solidFill>
                   <a:srgbClr val="3DAE72"/>
                 </a:solidFill>
@@ -29724,17 +29087,17 @@
               </a:rPr>
               <a:t>Предварительная</a:t>
             </a:r>
-            <a:endParaRPr lang="en-US" sz="1800" dirty="0"/>
+            <a:endParaRPr lang="en-US" sz="1900" dirty="0"/>
           </a:p>
           <a:p>
             <a:pPr indent="0" marL="0">
               <a:lnSpc>
-                <a:spcPts val="2300"/>
+                <a:spcPts val="2400"/>
               </a:lnSpc>
               <a:buNone/>
             </a:pPr>
             <a:r>
-              <a:rPr lang="en-US" sz="1800" b="1" dirty="0">
+              <a:rPr lang="en-US" sz="1900" b="1" dirty="0">
                 <a:solidFill>
                   <a:srgbClr val="3DAE72"/>
                 </a:solidFill>
@@ -29744,20 +29107,20 @@
               </a:rPr>
               <a:t>смета</a:t>
             </a:r>
-            <a:endParaRPr lang="en-US" sz="1800" dirty="0"/>
-          </a:p>
-        </p:txBody>
-      </p:sp>
-      <p:sp>
-        <p:nvSpPr>
-          <p:cNvPr id="20" name="Text 14"/>
-          <p:cNvSpPr/>
-          <p:nvPr/>
-        </p:nvSpPr>
-        <p:spPr>
-          <a:xfrm>
-            <a:off x="8321040" y="3611880"/>
-            <a:ext cx="2743200" cy="502920"/>
+            <a:endParaRPr lang="en-US" sz="1900" dirty="0"/>
+          </a:p>
+        </p:txBody>
+      </p:sp>
+      <p:sp>
+        <p:nvSpPr>
+          <p:cNvPr id="14" name="Text 11"/>
+          <p:cNvSpPr/>
+          <p:nvPr/>
+        </p:nvSpPr>
+        <p:spPr>
+          <a:xfrm>
+            <a:off x="8321040" y="3154680"/>
+            <a:ext cx="2743200" cy="731520"/>
           </a:xfrm>
           <a:prstGeom prst="rect">
             <a:avLst/>
@@ -29771,12 +29134,12 @@
           <a:p>
             <a:pPr indent="0" marL="0">
               <a:lnSpc>
-                <a:spcPts val="1600"/>
+                <a:spcPts val="1800"/>
               </a:lnSpc>
               <a:buNone/>
             </a:pPr>
             <a:r>
-              <a:rPr lang="en-US" sz="1200" dirty="0">
+              <a:rPr lang="en-US" sz="1300" dirty="0">
                 <a:solidFill>
                   <a:srgbClr val="97A0B5"/>
                 </a:solidFill>
@@ -29786,13 +29149,13 @@
               </a:rPr>
               <a:t>похожие контракты, наши загруженные расчёты, открытые источники</a:t>
             </a:r>
-            <a:endParaRPr lang="en-US" sz="1200" dirty="0"/>
-          </a:p>
-        </p:txBody>
-      </p:sp>
-      <p:sp>
-        <p:nvSpPr>
-          <p:cNvPr id="21" name="Shape 15"/>
+            <a:endParaRPr lang="en-US" sz="1300" dirty="0"/>
+          </a:p>
+        </p:txBody>
+      </p:sp>
+      <p:sp>
+        <p:nvSpPr>
+          <p:cNvPr id="15" name="Shape 12"/>
           <p:cNvSpPr/>
           <p:nvPr/>
         </p:nvSpPr>
@@ -29819,7 +29182,7 @@
       </p:sp>
       <p:sp>
         <p:nvSpPr>
-          <p:cNvPr id="22" name="Text 16"/>
+          <p:cNvPr id="16" name="Text 13"/>
           <p:cNvSpPr/>
           <p:nvPr/>
         </p:nvSpPr>
@@ -29858,7 +29221,7 @@
       </p:sp>
       <p:sp>
         <p:nvSpPr>
-          <p:cNvPr id="23" name="Shape 17"/>
+          <p:cNvPr id="17" name="Shape 14"/>
           <p:cNvSpPr/>
           <p:nvPr/>
         </p:nvSpPr>
@@ -29878,7 +29241,7 @@
       </p:sp>
       <p:sp>
         <p:nvSpPr>
-          <p:cNvPr id="24" name="Text 18"/>
+          <p:cNvPr id="18" name="Text 15"/>
           <p:cNvSpPr/>
           <p:nvPr/>
         </p:nvSpPr>
@@ -29917,7 +29280,7 @@
       </p:sp>
       <p:sp>
         <p:nvSpPr>
-          <p:cNvPr id="25" name="Shape 19"/>
+          <p:cNvPr id="19" name="Shape 16"/>
           <p:cNvSpPr/>
           <p:nvPr/>
         </p:nvSpPr>
@@ -29937,7 +29300,7 @@
       </p:sp>
       <p:sp>
         <p:nvSpPr>
-          <p:cNvPr id="26" name="Text 20"/>
+          <p:cNvPr id="20" name="Text 17"/>
           <p:cNvSpPr/>
           <p:nvPr/>
         </p:nvSpPr>
@@ -29987,16 +29350,9 @@
   <p:cSld name="Slide 38">
     <p:bg>
       <p:bgPr>
-        <a:blipFill dpi="0" rotWithShape="1">
-          <a:blip r:embed="rId1">
-            <a:lum/>
-          </a:blip>
-          <a:srcRect/>
-          <a:stretch>
-            <a:fillRect/>
-          </a:stretch>
-        </a:blipFill>
-        <a:effectLst/>
+        <a:solidFill>
+          <a:srgbClr val="12141A"/>
+        </a:solidFill>
       </p:bgPr>
     </p:bg>
     <p:spTree>
@@ -30622,16 +29978,9 @@
   <p:cSld name="Slide 39">
     <p:bg>
       <p:bgPr>
-        <a:blipFill dpi="0" rotWithShape="1">
-          <a:blip r:embed="rId1">
-            <a:lum/>
-          </a:blip>
-          <a:srcRect/>
-          <a:stretch>
-            <a:fillRect/>
-          </a:stretch>
-        </a:blipFill>
-        <a:effectLst/>
+        <a:solidFill>
+          <a:srgbClr val="12141A"/>
+        </a:solidFill>
       </p:bgPr>
     </p:bg>
     <p:spTree>
@@ -31385,16 +30734,9 @@
   <p:cSld name="Slide 4">
     <p:bg>
       <p:bgPr>
-        <a:blipFill dpi="0" rotWithShape="1">
-          <a:blip r:embed="rId1">
-            <a:lum/>
-          </a:blip>
-          <a:srcRect/>
-          <a:stretch>
-            <a:fillRect/>
-          </a:stretch>
-        </a:blipFill>
-        <a:effectLst/>
+        <a:solidFill>
+          <a:srgbClr val="12141A"/>
+        </a:solidFill>
       </p:bgPr>
     </p:bg>
     <p:spTree>
@@ -31544,16 +30886,9 @@
   <p:cSld name="Slide 40">
     <p:bg>
       <p:bgPr>
-        <a:blipFill dpi="0" rotWithShape="1">
-          <a:blip r:embed="rId1">
-            <a:lum/>
-          </a:blip>
-          <a:srcRect/>
-          <a:stretch>
-            <a:fillRect/>
-          </a:stretch>
-        </a:blipFill>
-        <a:effectLst/>
+        <a:solidFill>
+          <a:srgbClr val="12141A"/>
+        </a:solidFill>
       </p:bgPr>
     </p:bg>
     <p:spTree>
@@ -31762,16 +31097,9 @@
   <p:cSld name="Slide 5">
     <p:bg>
       <p:bgPr>
-        <a:blipFill dpi="0" rotWithShape="1">
-          <a:blip r:embed="rId1">
-            <a:lum/>
-          </a:blip>
-          <a:srcRect/>
-          <a:stretch>
-            <a:fillRect/>
-          </a:stretch>
-        </a:blipFill>
-        <a:effectLst/>
+        <a:solidFill>
+          <a:srgbClr val="12141A"/>
+        </a:solidFill>
       </p:bgPr>
     </p:bg>
     <p:spTree>
@@ -32177,16 +31505,9 @@
   <p:cSld name="Slide 6">
     <p:bg>
       <p:bgPr>
-        <a:blipFill dpi="0" rotWithShape="1">
-          <a:blip r:embed="rId1">
-            <a:lum/>
-          </a:blip>
-          <a:srcRect/>
-          <a:stretch>
-            <a:fillRect/>
-          </a:stretch>
-        </a:blipFill>
-        <a:effectLst/>
+        <a:solidFill>
+          <a:srgbClr val="12141A"/>
+        </a:solidFill>
       </p:bgPr>
     </p:bg>
     <p:spTree>
@@ -32277,51 +31598,27 @@
         </p:nvSpPr>
         <p:spPr>
           <a:xfrm>
-            <a:off x="1005840" y="2103120"/>
-            <a:ext cx="658368" cy="658368"/>
-          </a:xfrm>
-          <a:prstGeom prst="ellipse">
-            <a:avLst/>
-          </a:prstGeom>
-          <a:solidFill>
-            <a:srgbClr val="232838"/>
-          </a:solidFill>
-          <a:ln/>
-        </p:spPr>
-      </p:sp>
-      <p:pic>
-        <p:nvPicPr>
-          <p:cNvPr id="6" name="Image 0" descr="/home/user/analizator-bot/talks/2026-08-06-prodavay-kak-faunder/assets/ic-gos.png">    </p:cNvPr>
-          <p:cNvPicPr>
-            <a:picLocks noChangeAspect="1"/>
-          </p:cNvPicPr>
-          <p:nvPr/>
-        </p:nvPicPr>
-        <p:blipFill>
-          <a:blip r:embed="rId2"/>
-          <a:stretch>
-            <a:fillRect/>
-          </a:stretch>
-        </p:blipFill>
-        <p:spPr>
-          <a:xfrm>
-            <a:off x="1163848" y="2261128"/>
-            <a:ext cx="342351" cy="342351"/>
-          </a:xfrm>
-          <a:prstGeom prst="rect">
-            <a:avLst/>
-          </a:prstGeom>
-        </p:spPr>
-      </p:pic>
-      <p:sp>
-        <p:nvSpPr>
-          <p:cNvPr id="7" name="Text 3"/>
-          <p:cNvSpPr/>
-          <p:nvPr/>
-        </p:nvSpPr>
-        <p:spPr>
-          <a:xfrm>
-            <a:off x="1005840" y="2880360"/>
+            <a:off x="1005840" y="2148840"/>
+            <a:ext cx="182880" cy="182880"/>
+          </a:xfrm>
+          <a:prstGeom prst="ellipse">
+            <a:avLst/>
+          </a:prstGeom>
+          <a:solidFill>
+            <a:srgbClr val="4A90D9"/>
+          </a:solidFill>
+          <a:ln/>
+        </p:spPr>
+      </p:sp>
+      <p:sp>
+        <p:nvSpPr>
+          <p:cNvPr id="6" name="Text 3"/>
+          <p:cNvSpPr/>
+          <p:nvPr/>
+        </p:nvSpPr>
+        <p:spPr>
+          <a:xfrm>
+            <a:off x="1005840" y="2514600"/>
             <a:ext cx="2834640" cy="411480"/>
           </a:xfrm>
           <a:prstGeom prst="rect">
@@ -32354,13 +31651,13 @@
       </p:sp>
       <p:sp>
         <p:nvSpPr>
-          <p:cNvPr id="8" name="Text 4"/>
-          <p:cNvSpPr/>
-          <p:nvPr/>
-        </p:nvSpPr>
-        <p:spPr>
-          <a:xfrm>
-            <a:off x="1005840" y="3291840"/>
+          <p:cNvPr id="7" name="Text 4"/>
+          <p:cNvSpPr/>
+          <p:nvPr/>
+        </p:nvSpPr>
+        <p:spPr>
+          <a:xfrm>
+            <a:off x="1005840" y="2926080"/>
             <a:ext cx="2834640" cy="320040"/>
           </a:xfrm>
           <a:prstGeom prst="rect">
@@ -32393,13 +31690,13 @@
       </p:sp>
       <p:sp>
         <p:nvSpPr>
-          <p:cNvPr id="9" name="Text 5"/>
-          <p:cNvSpPr/>
-          <p:nvPr/>
-        </p:nvSpPr>
-        <p:spPr>
-          <a:xfrm>
-            <a:off x="1005840" y="3749040"/>
+          <p:cNvPr id="8" name="Text 5"/>
+          <p:cNvSpPr/>
+          <p:nvPr/>
+        </p:nvSpPr>
+        <p:spPr>
+          <a:xfrm>
+            <a:off x="1005840" y="3429000"/>
             <a:ext cx="2834640" cy="914400"/>
           </a:xfrm>
           <a:prstGeom prst="rect">
@@ -32455,13 +31752,13 @@
       </p:sp>
       <p:sp>
         <p:nvSpPr>
-          <p:cNvPr id="10" name="Text 6"/>
-          <p:cNvSpPr/>
-          <p:nvPr/>
-        </p:nvSpPr>
-        <p:spPr>
-          <a:xfrm>
-            <a:off x="1005840" y="4754880"/>
+          <p:cNvPr id="9" name="Text 6"/>
+          <p:cNvSpPr/>
+          <p:nvPr/>
+        </p:nvSpPr>
+        <p:spPr>
+          <a:xfrm>
+            <a:off x="1005840" y="4617720"/>
             <a:ext cx="2834640" cy="457200"/>
           </a:xfrm>
           <a:prstGeom prst="rect">
@@ -32494,7 +31791,7 @@
       </p:sp>
       <p:sp>
         <p:nvSpPr>
-          <p:cNvPr id="11" name="Shape 7"/>
+          <p:cNvPr id="10" name="Shape 7"/>
           <p:cNvSpPr/>
           <p:nvPr/>
         </p:nvSpPr>
@@ -32521,57 +31818,33 @@
       </p:sp>
       <p:sp>
         <p:nvSpPr>
-          <p:cNvPr id="12" name="Shape 8"/>
-          <p:cNvSpPr/>
-          <p:nvPr/>
-        </p:nvSpPr>
-        <p:spPr>
-          <a:xfrm>
-            <a:off x="4709160" y="2103120"/>
-            <a:ext cx="658368" cy="658368"/>
-          </a:xfrm>
-          <a:prstGeom prst="ellipse">
-            <a:avLst/>
-          </a:prstGeom>
-          <a:solidFill>
-            <a:srgbClr val="232838"/>
-          </a:solidFill>
-          <a:ln/>
-        </p:spPr>
-      </p:sp>
-      <p:pic>
-        <p:nvPicPr>
-          <p:cNvPr id="13" name="Image 1" descr="/home/user/analizator-bot/talks/2026-08-06-prodavay-kak-faunder/assets/ic-corp.png">    </p:cNvPr>
-          <p:cNvPicPr>
-            <a:picLocks noChangeAspect="1"/>
-          </p:cNvPicPr>
-          <p:nvPr/>
-        </p:nvPicPr>
-        <p:blipFill>
-          <a:blip r:embed="rId3"/>
-          <a:stretch>
-            <a:fillRect/>
-          </a:stretch>
-        </p:blipFill>
-        <p:spPr>
-          <a:xfrm>
-            <a:off x="4867168" y="2261128"/>
-            <a:ext cx="342351" cy="342351"/>
-          </a:xfrm>
-          <a:prstGeom prst="rect">
-            <a:avLst/>
-          </a:prstGeom>
-        </p:spPr>
-      </p:pic>
-      <p:sp>
-        <p:nvSpPr>
-          <p:cNvPr id="14" name="Text 9"/>
-          <p:cNvSpPr/>
-          <p:nvPr/>
-        </p:nvSpPr>
-        <p:spPr>
-          <a:xfrm>
-            <a:off x="4709160" y="2880360"/>
+          <p:cNvPr id="11" name="Shape 8"/>
+          <p:cNvSpPr/>
+          <p:nvPr/>
+        </p:nvSpPr>
+        <p:spPr>
+          <a:xfrm>
+            <a:off x="4709160" y="2148840"/>
+            <a:ext cx="182880" cy="182880"/>
+          </a:xfrm>
+          <a:prstGeom prst="ellipse">
+            <a:avLst/>
+          </a:prstGeom>
+          <a:solidFill>
+            <a:srgbClr val="9B6BD9"/>
+          </a:solidFill>
+          <a:ln/>
+        </p:spPr>
+      </p:sp>
+      <p:sp>
+        <p:nvSpPr>
+          <p:cNvPr id="12" name="Text 9"/>
+          <p:cNvSpPr/>
+          <p:nvPr/>
+        </p:nvSpPr>
+        <p:spPr>
+          <a:xfrm>
+            <a:off x="4709160" y="2514600"/>
             <a:ext cx="2834640" cy="411480"/>
           </a:xfrm>
           <a:prstGeom prst="rect">
@@ -32604,13 +31877,13 @@
       </p:sp>
       <p:sp>
         <p:nvSpPr>
-          <p:cNvPr id="15" name="Text 10"/>
-          <p:cNvSpPr/>
-          <p:nvPr/>
-        </p:nvSpPr>
-        <p:spPr>
-          <a:xfrm>
-            <a:off x="4709160" y="3291840"/>
+          <p:cNvPr id="13" name="Text 10"/>
+          <p:cNvSpPr/>
+          <p:nvPr/>
+        </p:nvSpPr>
+        <p:spPr>
+          <a:xfrm>
+            <a:off x="4709160" y="2926080"/>
             <a:ext cx="2834640" cy="320040"/>
           </a:xfrm>
           <a:prstGeom prst="rect">
@@ -32643,13 +31916,13 @@
       </p:sp>
       <p:sp>
         <p:nvSpPr>
-          <p:cNvPr id="16" name="Text 11"/>
-          <p:cNvSpPr/>
-          <p:nvPr/>
-        </p:nvSpPr>
-        <p:spPr>
-          <a:xfrm>
-            <a:off x="4709160" y="3749040"/>
+          <p:cNvPr id="14" name="Text 11"/>
+          <p:cNvSpPr/>
+          <p:nvPr/>
+        </p:nvSpPr>
+        <p:spPr>
+          <a:xfrm>
+            <a:off x="4709160" y="3429000"/>
             <a:ext cx="2834640" cy="914400"/>
           </a:xfrm>
           <a:prstGeom prst="rect">
@@ -32705,13 +31978,13 @@
       </p:sp>
       <p:sp>
         <p:nvSpPr>
-          <p:cNvPr id="17" name="Text 12"/>
-          <p:cNvSpPr/>
-          <p:nvPr/>
-        </p:nvSpPr>
-        <p:spPr>
-          <a:xfrm>
-            <a:off x="4709160" y="4754880"/>
+          <p:cNvPr id="15" name="Text 12"/>
+          <p:cNvSpPr/>
+          <p:nvPr/>
+        </p:nvSpPr>
+        <p:spPr>
+          <a:xfrm>
+            <a:off x="4709160" y="4617720"/>
             <a:ext cx="2834640" cy="457200"/>
           </a:xfrm>
           <a:prstGeom prst="rect">
@@ -32744,7 +32017,7 @@
       </p:sp>
       <p:sp>
         <p:nvSpPr>
-          <p:cNvPr id="18" name="Shape 13"/>
+          <p:cNvPr id="16" name="Shape 13"/>
           <p:cNvSpPr/>
           <p:nvPr/>
         </p:nvSpPr>
@@ -32771,57 +32044,33 @@
       </p:sp>
       <p:sp>
         <p:nvSpPr>
-          <p:cNvPr id="19" name="Shape 14"/>
-          <p:cNvSpPr/>
-          <p:nvPr/>
-        </p:nvSpPr>
-        <p:spPr>
-          <a:xfrm>
-            <a:off x="8412480" y="2103120"/>
-            <a:ext cx="658368" cy="658368"/>
-          </a:xfrm>
-          <a:prstGeom prst="ellipse">
-            <a:avLst/>
-          </a:prstGeom>
-          <a:solidFill>
-            <a:srgbClr val="232838"/>
-          </a:solidFill>
-          <a:ln/>
-        </p:spPr>
-      </p:sp>
-      <p:pic>
-        <p:nvPicPr>
-          <p:cNvPr id="20" name="Image 2" descr="/home/user/analizator-bot/talks/2026-08-06-prodavay-kak-faunder/assets/ic-com.png">    </p:cNvPr>
-          <p:cNvPicPr>
-            <a:picLocks noChangeAspect="1"/>
-          </p:cNvPicPr>
-          <p:nvPr/>
-        </p:nvPicPr>
-        <p:blipFill>
-          <a:blip r:embed="rId4"/>
-          <a:stretch>
-            <a:fillRect/>
-          </a:stretch>
-        </p:blipFill>
-        <p:spPr>
-          <a:xfrm>
-            <a:off x="8570488" y="2261128"/>
-            <a:ext cx="342351" cy="342351"/>
-          </a:xfrm>
-          <a:prstGeom prst="rect">
-            <a:avLst/>
-          </a:prstGeom>
-        </p:spPr>
-      </p:pic>
-      <p:sp>
-        <p:nvSpPr>
-          <p:cNvPr id="21" name="Text 15"/>
-          <p:cNvSpPr/>
-          <p:nvPr/>
-        </p:nvSpPr>
-        <p:spPr>
-          <a:xfrm>
-            <a:off x="8412480" y="2880360"/>
+          <p:cNvPr id="17" name="Shape 14"/>
+          <p:cNvSpPr/>
+          <p:nvPr/>
+        </p:nvSpPr>
+        <p:spPr>
+          <a:xfrm>
+            <a:off x="8412480" y="2148840"/>
+            <a:ext cx="182880" cy="182880"/>
+          </a:xfrm>
+          <a:prstGeom prst="ellipse">
+            <a:avLst/>
+          </a:prstGeom>
+          <a:solidFill>
+            <a:srgbClr val="F0862E"/>
+          </a:solidFill>
+          <a:ln/>
+        </p:spPr>
+      </p:sp>
+      <p:sp>
+        <p:nvSpPr>
+          <p:cNvPr id="18" name="Text 15"/>
+          <p:cNvSpPr/>
+          <p:nvPr/>
+        </p:nvSpPr>
+        <p:spPr>
+          <a:xfrm>
+            <a:off x="8412480" y="2514600"/>
             <a:ext cx="2834640" cy="411480"/>
           </a:xfrm>
           <a:prstGeom prst="rect">
@@ -32854,13 +32103,13 @@
       </p:sp>
       <p:sp>
         <p:nvSpPr>
-          <p:cNvPr id="22" name="Text 16"/>
-          <p:cNvSpPr/>
-          <p:nvPr/>
-        </p:nvSpPr>
-        <p:spPr>
-          <a:xfrm>
-            <a:off x="8412480" y="3291840"/>
+          <p:cNvPr id="19" name="Text 16"/>
+          <p:cNvSpPr/>
+          <p:nvPr/>
+        </p:nvSpPr>
+        <p:spPr>
+          <a:xfrm>
+            <a:off x="8412480" y="2926080"/>
             <a:ext cx="2834640" cy="320040"/>
           </a:xfrm>
           <a:prstGeom prst="rect">
@@ -32893,13 +32142,13 @@
       </p:sp>
       <p:sp>
         <p:nvSpPr>
-          <p:cNvPr id="23" name="Text 17"/>
-          <p:cNvSpPr/>
-          <p:nvPr/>
-        </p:nvSpPr>
-        <p:spPr>
-          <a:xfrm>
-            <a:off x="8412480" y="3749040"/>
+          <p:cNvPr id="20" name="Text 17"/>
+          <p:cNvSpPr/>
+          <p:nvPr/>
+        </p:nvSpPr>
+        <p:spPr>
+          <a:xfrm>
+            <a:off x="8412480" y="3429000"/>
             <a:ext cx="2834640" cy="914400"/>
           </a:xfrm>
           <a:prstGeom prst="rect">
@@ -32955,13 +32204,13 @@
       </p:sp>
       <p:sp>
         <p:nvSpPr>
-          <p:cNvPr id="24" name="Text 18"/>
-          <p:cNvSpPr/>
-          <p:nvPr/>
-        </p:nvSpPr>
-        <p:spPr>
-          <a:xfrm>
-            <a:off x="8412480" y="4754880"/>
+          <p:cNvPr id="21" name="Text 18"/>
+          <p:cNvSpPr/>
+          <p:nvPr/>
+        </p:nvSpPr>
+        <p:spPr>
+          <a:xfrm>
+            <a:off x="8412480" y="4617720"/>
             <a:ext cx="2834640" cy="457200"/>
           </a:xfrm>
           <a:prstGeom prst="rect">
@@ -33005,16 +32254,9 @@
   <p:cSld name="Slide 7">
     <p:bg>
       <p:bgPr>
-        <a:blipFill dpi="0" rotWithShape="1">
-          <a:blip r:embed="rId1">
-            <a:lum/>
-          </a:blip>
-          <a:srcRect/>
-          <a:stretch>
-            <a:fillRect/>
-          </a:stretch>
-        </a:blipFill>
-        <a:effectLst/>
+        <a:solidFill>
+          <a:srgbClr val="12141A"/>
+        </a:solidFill>
       </p:bgPr>
     </p:bg>
     <p:spTree>
@@ -33552,16 +32794,9 @@
   <p:cSld name="Slide 8">
     <p:bg>
       <p:bgPr>
-        <a:blipFill dpi="0" rotWithShape="1">
-          <a:blip r:embed="rId1">
-            <a:lum/>
-          </a:blip>
-          <a:srcRect/>
-          <a:stretch>
-            <a:fillRect/>
-          </a:stretch>
-        </a:blipFill>
-        <a:effectLst/>
+        <a:solidFill>
+          <a:srgbClr val="12141A"/>
+        </a:solidFill>
       </p:bgPr>
     </p:bg>
     <p:spTree>
@@ -34592,16 +33827,9 @@
   <p:cSld name="Slide 9">
     <p:bg>
       <p:bgPr>
-        <a:blipFill dpi="0" rotWithShape="1">
-          <a:blip r:embed="rId1">
-            <a:lum/>
-          </a:blip>
-          <a:srcRect/>
-          <a:stretch>
-            <a:fillRect/>
-          </a:stretch>
-        </a:blipFill>
-        <a:effectLst/>
+        <a:solidFill>
+          <a:srgbClr val="12141A"/>
+        </a:solidFill>
       </p:bgPr>
     </p:bg>
     <p:spTree>
